--- a/presentation/JobHopper_Final_Presentation.pptx
+++ b/presentation/JobHopper_Final_Presentation.pptx
@@ -1138,7 +1138,7 @@
           <a:lstStyle/>
           <a:p>
             <a:r>
-              <a:t>[11:30 - 12:30]   SPEAKER 1</a:t>
+              <a:t>[11:20 - 12:10]   SPEAKER 1</a:t>
             </a:r>
           </a:p>
           <a:p/>
@@ -1150,60 +1150,59 @@
           <a:p/>
           <a:p>
             <a:r>
-              <a:t>On the left. Every core feature is live. Our postings are real - ingested from a</a:t>
-            </a:r>
-          </a:p>
-          <a:p>
-            <a:r>
-              <a:t>live job-search API, which meant dealing with genuinely messy description text.</a:t>
-            </a:r>
-          </a:p>
-          <a:p>
-            <a:r>
-              <a:t>The question bank beat its own target: we aimed for ten per skill per difficulty</a:t>
-            </a:r>
-          </a:p>
-          <a:p>
-            <a:r>
-              <a:t>and shipped fifteen, which is 1,260 questions. And the process held - 189</a:t>
-            </a:r>
-          </a:p>
-          <a:p>
-            <a:r>
-              <a:t>commits, 44 reviewed pull requests, 237 tests.</a:t>
+              <a:t>On the left, what worked. Registration and sign-in, real postings parsed into a</a:t>
+            </a:r>
+          </a:p>
+          <a:p>
+            <a:r>
+              <a:t>cloud from whatever the user asked for, the timed game with live scoring, every</a:t>
+            </a:r>
+          </a:p>
+          <a:p>
+            <a:r>
+              <a:t>result saved. The question bank beat its own target - we aimed for ten per skill</a:t>
+            </a:r>
+          </a:p>
+          <a:p>
+            <a:r>
+              <a:t>per difficulty and shipped fifteen, so 1,260 questions. And 237 tests on every</a:t>
+            </a:r>
+          </a:p>
+          <a:p>
+            <a:r>
+              <a:t>pull request.</a:t>
             </a:r>
           </a:p>
           <a:p/>
           <a:p>
             <a:r>
-              <a:t>On the right, what changed. The prep roadmap has a finished, tested API and no</a:t>
-            </a:r>
-          </a:p>
-          <a:p>
-            <a:r>
-              <a:t>screen; with the time left, we chose to make the quiz good rather than make the</a:t>
-            </a:r>
-          </a:p>
-          <a:p>
-            <a:r>
-              <a:t>roadmap merely exist.</a:t>
+              <a:t>On the right, what changed. The top two are the same story: the external API</a:t>
+            </a:r>
+          </a:p>
+          <a:p>
+            <a:r>
+              <a:t>limited what we could reliably fetch, so typing any role became four supported</a:t>
+            </a:r>
+          </a:p>
+          <a:p>
+            <a:r>
+              <a:t>roles, and location became a menu of places that actually have postings behind</a:t>
+            </a:r>
+          </a:p>
+          <a:p>
+            <a:r>
+              <a:t>them. Both were us refusing to offer a search that comes back empty.</a:t>
             </a:r>
           </a:p>
           <a:p/>
           <a:p>
             <a:r>
-              <a:t>Maximum salary we removed rather than ship a filter that quietly did nothing.</a:t>
-            </a:r>
-          </a:p>
-          <a:p/>
-          <a:p>
-            <a:r>
-              <a:t>Named ranks are on our rules page but not in the scoring yet - our docs got ahead</a:t>
-            </a:r>
-          </a:p>
-          <a:p>
-            <a:r>
-              <a:t>of the app, and that's on us.</a:t>
+              <a:t>The rest is us choosing depth over breadth - and one place where our</a:t>
+            </a:r>
+          </a:p>
+          <a:p>
+            <a:r>
+              <a:t>documentation got ahead of the app, which is on us.</a:t>
             </a:r>
           </a:p>
         </p:txBody>
@@ -1388,49 +1387,54 @@
           <a:p/>
           <a:p>
             <a:r>
-              <a:t>The problem isn't that this information is secret - job postings are public. It's</a:t>
-            </a:r>
-          </a:p>
-          <a:p>
-            <a:r>
-              <a:t>volume. Search one title and you get forty postings, each with its own wall of</a:t>
-            </a:r>
-          </a:p>
-          <a:p>
-            <a:r>
-              <a:t>requirements. The signal is which tools keep repeating, and nobody reads forty</a:t>
-            </a:r>
-          </a:p>
-          <a:p>
-            <a:r>
-              <a:t>postings to find it. So people guess at what to learn next.</a:t>
+              <a:t>The problem isn't that this information is secret - job postings are public.</a:t>
+            </a:r>
+          </a:p>
+          <a:p>
+            <a:r>
+              <a:t>It's volume. Search one title and you get forty postings, each with its own wall</a:t>
+            </a:r>
+          </a:p>
+          <a:p>
+            <a:r>
+              <a:t>of requirements. The signal is which tools keep repeating, and nobody reads</a:t>
+            </a:r>
+          </a:p>
+          <a:p>
+            <a:r>
+              <a:t>forty postings to find it. So people guess at what to learn next.</a:t>
             </a:r>
           </a:p>
           <a:p/>
           <a:p>
             <a:r>
-              <a:t>JobHopper does the reading. It pulls the current postings for a role, extracts</a:t>
-            </a:r>
-          </a:p>
-          <a:p>
-            <a:r>
-              <a:t>the tools and skills, and sizes them by how many postings actually mention each</a:t>
-            </a:r>
-          </a:p>
-          <a:p>
-            <a:r>
-              <a:t>one. The big words are what the market keeps asking for.</a:t>
+              <a:t>So our goal was this: analyse the job postings for a target role, identify the</a:t>
+            </a:r>
+          </a:p>
+          <a:p>
+            <a:r>
+              <a:t>most in-demand skills, and show them as a word cloud - then help people actually</a:t>
+            </a:r>
+          </a:p>
+          <a:p>
+            <a:r>
+              <a:t>build those skills through interactive Q&amp;A games.</a:t>
             </a:r>
           </a:p>
           <a:p/>
           <a:p>
             <a:r>
-              <a:t>Then it does one more thing: every skill in that picture is clickable. Click</a:t>
-            </a:r>
-          </a:p>
-          <a:p>
-            <a:r>
-              <a:t>Python, and you're in a timed quiz on Python.</a:t>
+              <a:t>That second half is what we care about. Every skill in the picture is clickable.</a:t>
+            </a:r>
+          </a:p>
+          <a:p>
+            <a:r>
+              <a:t>Click Python, and you're in a timed quiz on Python. It doesn't just tell you</a:t>
+            </a:r>
+          </a:p>
+          <a:p>
+            <a:r>
+              <a:t>what to learn - it gives you somewhere to start.</a:t>
             </a:r>
           </a:p>
         </p:txBody>
@@ -1500,62 +1504,55 @@
           <a:lstStyle/>
           <a:p>
             <a:r>
-              <a:t>[1:00 - 1:55]   SPEAKER 2</a:t>
+              <a:t>[1:00 - 1:50]   SPEAKER 2</a:t>
             </a:r>
           </a:p>
           <a:p/>
           <a:p>
             <a:r>
-              <a:t>These are our functional requirements - what the system has to do.</a:t>
+              <a:t>These are our functional requirements, written the way we specified them. I</a:t>
+            </a:r>
+          </a:p>
+          <a:p>
+            <a:r>
+              <a:t>won't read them all - two things to point at.</a:t>
             </a:r>
           </a:p>
           <a:p/>
           <a:p>
             <a:r>
-              <a:t>FR1, accounts: register, sign in, stay signed in, sign out. Usernames four to</a:t>
-            </a:r>
-          </a:p>
-          <a:p>
-            <a:r>
-              <a:t>sixteen characters, passwords eight to twenty, sessions last twenty-four hours.</a:t>
+              <a:t>In registration and login, it's the last pair: showing you your most recent game</a:t>
+            </a:r>
+          </a:p>
+          <a:p>
+            <a:r>
+              <a:t>score, and your three most recent searches. Those are the requirements that</a:t>
+            </a:r>
+          </a:p>
+          <a:p>
+            <a:r>
+              <a:t>forced everything to be stored against a real account rather than sitting in the</a:t>
+            </a:r>
+          </a:p>
+          <a:p>
+            <a:r>
+              <a:t>browser.</a:t>
             </a:r>
           </a:p>
           <a:p/>
           <a:p>
             <a:r>
-              <a:t>FR2 is the core feature. Pick a job title, optionally a location and a minimum</a:t>
-            </a:r>
-          </a:p>
-          <a:p>
-            <a:r>
-              <a:t>salary, then how many keywords and a shape. What comes back is the tools and</a:t>
-            </a:r>
-          </a:p>
-          <a:p>
-            <a:r>
-              <a:t>skills for that role, weighted by how many current postings mention each one.</a:t>
-            </a:r>
-          </a:p>
-          <a:p/>
-          <a:p>
-            <a:r>
-              <a:t>FR3, we remember it - every cloud a signed-in user generates is saved, and can be</a:t>
-            </a:r>
-          </a:p>
-          <a:p>
-            <a:r>
-              <a:t>re-run in one click.</a:t>
-            </a:r>
-          </a:p>
-          <a:p/>
-          <a:p>
-            <a:r>
-              <a:t>FR4 is the one people forget to write down. If the filters match too little data</a:t>
-            </a:r>
-          </a:p>
-          <a:p>
-            <a:r>
-              <a:t>to build an honest picture, the app says so rather than draw a misleading cloud.</a:t>
+              <a:t>And in word cloud creation, it's the last line. The size of each word is based</a:t>
+            </a:r>
+          </a:p>
+          <a:p>
+            <a:r>
+              <a:t>on how often that skill appears across the postings we pulled. Size equals</a:t>
+            </a:r>
+          </a:p>
+          <a:p>
+            <a:r>
+              <a:t>frequency - a count, not an opinion. That one sentence is the whole product.</a:t>
             </a:r>
           </a:p>
         </p:txBody>
@@ -1625,67 +1622,60 @@
           <a:lstStyle/>
           <a:p>
             <a:r>
-              <a:t>[2:00 - 2:55]   SPEAKER 2</a:t>
+              <a:t>[1:50 - 2:40]   SPEAKER 2</a:t>
             </a:r>
           </a:p>
           <a:p/>
           <a:p>
             <a:r>
-              <a:t>The second half turns that picture into practice.</a:t>
+              <a:t>Job scraping is two requirements. Count how often each keyword appears - and</a:t>
+            </a:r>
+          </a:p>
+          <a:p>
+            <a:r>
+              <a:t>display an error when there isn't enough job information to build a cloud. A</a:t>
+            </a:r>
+          </a:p>
+          <a:p>
+            <a:r>
+              <a:t>thin, misleading picture is worse than saying we can't build one, so we made</a:t>
+            </a:r>
+          </a:p>
+          <a:p>
+            <a:r>
+              <a:t>that a requirement rather than an edge case.</a:t>
             </a:r>
           </a:p>
           <a:p/>
           <a:p>
             <a:r>
-              <a:t>FR5: any skill with a question bank behind it is clickable. Ten multiple-choice</a:t>
-            </a:r>
-          </a:p>
-          <a:p>
-            <a:r>
-              <a:t>questions at easy, medium or hard, each with its own clock - three minutes, two,</a:t>
-            </a:r>
-          </a:p>
-          <a:p>
-            <a:r>
-              <a:t>or a minute and a half.</a:t>
+              <a:t>The Q&amp;A game block is the exact path you'll see in the demo: click any word, get</a:t>
+            </a:r>
+          </a:p>
+          <a:p>
+            <a:r>
+              <a:t>sent to that word's game, get questions matching the keyword and difficulty you</a:t>
+            </a:r>
+          </a:p>
+          <a:p>
+            <a:r>
+              <a:t>chose, on a timer, with your score at the end.</a:t>
             </a:r>
           </a:p>
           <a:p/>
           <a:p>
             <a:r>
-              <a:t>FR6 is the one we're most careful about. Every answer is locked in on the server</a:t>
-            </a:r>
-          </a:p>
-          <a:p>
-            <a:r>
-              <a:t>the moment it's chosen, and only then are you told whether it was right. Because</a:t>
-            </a:r>
-          </a:p>
-          <a:p>
-            <a:r>
-              <a:t>the choice is already committed, knowing the answer afterwards can't change it -</a:t>
-            </a:r>
-          </a:p>
-          <a:p>
-            <a:r>
-              <a:t>so the running score and the final score can never disagree.</a:t>
-            </a:r>
-          </a:p>
-          <a:p/>
-          <a:p>
-            <a:r>
-              <a:t>FR7: completed quizzes are saved with the skill, the difficulty and the score.</a:t>
-            </a:r>
-          </a:p>
-          <a:p/>
-          <a:p>
-            <a:r>
-              <a:t>FR8, the prep roadmap. I'll be straight - the API is built and tested, but it</a:t>
-            </a:r>
-          </a:p>
-          <a:p>
-            <a:r>
-              <a:t>never got a screen. More on that at the end.</a:t>
+              <a:t>One thing that isn't on the slide - every answer is locked in on the server</a:t>
+            </a:r>
+          </a:p>
+          <a:p>
+            <a:r>
+              <a:t>before you're told whether it was right, so the running score and the final</a:t>
+            </a:r>
+          </a:p>
+          <a:p>
+            <a:r>
+              <a:t>score can never disagree.</a:t>
             </a:r>
           </a:p>
         </p:txBody>
@@ -1755,7 +1745,7 @@
           <a:lstStyle/>
           <a:p>
             <a:r>
-              <a:t>[2:50 - 3:45]   SPEAKER 2</a:t>
+              <a:t>[2:40 - 3:30]   SPEAKER 2</a:t>
             </a:r>
           </a:p>
           <a:p/>
@@ -1767,62 +1757,43 @@
           <a:p/>
           <a:p>
             <a:r>
-              <a:t>Security: passwords are bcrypt-hashed, never stored or returned, and a failed</a:t>
-            </a:r>
-          </a:p>
-          <a:p>
-            <a:r>
-              <a:t>login gives one generic message either way - so you can't use our login form to</a:t>
-            </a:r>
-          </a:p>
-          <a:p>
-            <a:r>
-              <a:t>find out who has an account.</a:t>
+              <a:t>The top row is what we committed to in our spec: the cloud back within ten</a:t>
+            </a:r>
+          </a:p>
+          <a:p>
+            <a:r>
+              <a:t>seconds, the game open within ten and scored within seven, and all user input</a:t>
+            </a:r>
+          </a:p>
+          <a:p>
+            <a:r>
+              <a:t>validated and sanitised against injection. We get that last one structurally -</a:t>
+            </a:r>
+          </a:p>
+          <a:p>
+            <a:r>
+              <a:t>every query goes through the ORM, parameterised, never built by string.</a:t>
             </a:r>
           </a:p>
           <a:p/>
           <a:p>
             <a:r>
-              <a:t>Integrity: the server decides every score, never the browser, and a finished quiz</a:t>
-            </a:r>
-          </a:p>
-          <a:p>
-            <a:r>
-              <a:t>can't be replayed.</a:t>
-            </a:r>
-          </a:p>
-          <a:p/>
-          <a:p>
-            <a:r>
-              <a:t>Performance: the two hottest queries each run against a composite index we added</a:t>
-            </a:r>
-          </a:p>
-          <a:p>
-            <a:r>
-              <a:t>deliberately for them.</a:t>
-            </a:r>
-          </a:p>
-          <a:p/>
-          <a:p>
-            <a:r>
-              <a:t>Reliability: 237 automated tests, and nothing merges until both suites pass.</a:t>
-            </a:r>
-          </a:p>
-          <a:p/>
-          <a:p>
-            <a:r>
-              <a:t>Usability: responsive, validation next to the field, and every API error in one</a:t>
-            </a:r>
-          </a:p>
-          <a:p>
-            <a:r>
-              <a:t>shape.</a:t>
-            </a:r>
-          </a:p>
-          <a:p/>
-          <a:p>
-            <a:r>
-              <a:t>Portability: pinned versions, and the app builds its own database on first run.</a:t>
+              <a:t>The bottom row we held ourselves to as we built. Passwords bcrypt-hashed and</a:t>
+            </a:r>
+          </a:p>
+          <a:p>
+            <a:r>
+              <a:t>never returned, and a failed login gives the same generic message whether the</a:t>
+            </a:r>
+          </a:p>
+          <a:p>
+            <a:r>
+              <a:t>account exists or not. The server decides every score, never the browser. And</a:t>
+            </a:r>
+          </a:p>
+          <a:p>
+            <a:r>
+              <a:t>237 tests, with nothing merging until both suites pass.</a:t>
             </a:r>
           </a:p>
         </p:txBody>
@@ -2033,7 +2004,7 @@
           <a:lstStyle/>
           <a:p>
             <a:r>
-              <a:t>[4:40 - 5:30]   SPEAKER 3</a:t>
+              <a:t>[4:40 - 5:35]   SPEAKER 3</a:t>
             </a:r>
           </a:p>
           <a:p/>
@@ -2066,28 +2037,38 @@
           </a:p>
           <a:p>
             <a:r>
-              <a:t>identical database with zero setup. That removed a whole category of "works on my</a:t>
-            </a:r>
-          </a:p>
-          <a:p>
-            <a:r>
-              <a:t>machine". And SQLAlchemy keeps every query parameterised, so we're injection-safe</a:t>
-            </a:r>
-          </a:p>
-          <a:p>
-            <a:r>
-              <a:t>by construction.</a:t>
+              <a:t>identical database with zero setup. That removed a whole category of "works on</a:t>
+            </a:r>
+          </a:p>
+          <a:p>
+            <a:r>
+              <a:t>my machine". And SQLAlchemy keeps every query parameterised, so we're</a:t>
+            </a:r>
+          </a:p>
+          <a:p>
+            <a:r>
+              <a:t>injection-safe by construction.</a:t>
             </a:r>
           </a:p>
           <a:p/>
           <a:p>
             <a:r>
-              <a:t>Plain JavaScript, Bootstrap and Sass: a framework would have cost us a build step</a:t>
-            </a:r>
-          </a:p>
-          <a:p>
-            <a:r>
-              <a:t>and a learning curve on a semester clock.</a:t>
+              <a:t>On the front end - Figma first. We designed every screen before anyone built it,</a:t>
+            </a:r>
+          </a:p>
+          <a:p>
+            <a:r>
+              <a:t>which kept four people from producing four different-looking pages. Bootstrap's</a:t>
+            </a:r>
+          </a:p>
+          <a:p>
+            <a:r>
+              <a:t>components sped the build up and gave us a responsive grid immediately, and Sass</a:t>
+            </a:r>
+          </a:p>
+          <a:p>
+            <a:r>
+              <a:t>let us generate custom CSS from one shared palette across eleven pages.</a:t>
             </a:r>
           </a:p>
           <a:p/>
@@ -2367,7 +2348,7 @@
           </a:p>
           <a:p>
             <a:r>
-              <a:t>what you picked. That is what makes live scoring trustworthy, and what stops a</a:t>
+              <a:t>what you picked - that is what makes live scoring trustworthy, and what stops a</a:t>
             </a:r>
           </a:p>
           <a:p>
@@ -2378,12 +2359,7 @@
           <a:p/>
           <a:p>
             <a:r>
-              <a:t>Down the middle, USERS - every search, every attempt, and one roadmap per user</a:t>
-            </a:r>
-          </a:p>
-          <a:p>
-            <a:r>
-              <a:t>all hang off it.</a:t>
+              <a:t>And down the middle, USERS - every search and every attempt hangs off it.</a:t>
             </a:r>
           </a:p>
         </p:txBody>
@@ -8581,7 +8557,7 @@
                 </a:solidFill>
                 <a:latin typeface="Calibri"/>
               </a:rPr>
-              <a:t>What we achieved, and what we changed</a:t>
+              <a:t>How much was achieved, and what was altered</a:t>
             </a:r>
           </a:p>
         </p:txBody>
@@ -8667,7 +8643,7 @@
         <p:spPr>
           <a:xfrm>
             <a:off x="658368" y="1955546"/>
-            <a:ext cx="5300319" cy="3718687"/>
+            <a:ext cx="5300319" cy="3834892"/>
           </a:xfrm>
           <a:prstGeom prst="roundRect">
             <a:avLst>
@@ -8701,7 +8677,7 @@
         <p:spPr>
           <a:xfrm>
             <a:off x="658368" y="1955546"/>
-            <a:ext cx="50292" cy="3718687"/>
+            <a:ext cx="50292" cy="3834892"/>
           </a:xfrm>
           <a:prstGeom prst="rect">
             <a:avLst/>
@@ -8773,7 +8749,7 @@
         <p:spPr>
           <a:xfrm>
             <a:off x="946404" y="2563114"/>
-            <a:ext cx="4847691" cy="2471293"/>
+            <a:ext cx="4847691" cy="2602992"/>
           </a:xfrm>
           <a:prstGeom prst="rect">
             <a:avLst/>
@@ -8795,146 +8771,146 @@
               </a:spcAft>
             </a:pPr>
             <a:r>
-              <a:rPr sz="1450" b="0">
+              <a:rPr sz="1400" b="0">
                 <a:solidFill>
                   <a:srgbClr val="5E6B7C"/>
                 </a:solidFill>
                 <a:latin typeface="Calibri"/>
               </a:rPr>
-              <a:t>▸ Every core feature is live: accounts, word cloud, timed quiz</a:t>
-            </a:r>
-          </a:p>
-          <a:p>
-            <a:pPr algn="l">
-              <a:spcBef>
-                <a:spcPts val="0"/>
-              </a:spcBef>
-              <a:spcAft>
-                <a:spcPts val="0"/>
-              </a:spcAft>
-            </a:pPr>
-            <a:r>
-              <a:rPr sz="1450" b="0">
+              <a:t>▸ Users can register, sign in, and stay signed in.</a:t>
+            </a:r>
+          </a:p>
+          <a:p>
+            <a:pPr algn="l">
+              <a:spcBef>
+                <a:spcPts val="770"/>
+              </a:spcBef>
+              <a:spcAft>
+                <a:spcPts val="0"/>
+              </a:spcAft>
+            </a:pPr>
+            <a:r>
+              <a:rPr sz="1400" b="0">
                 <a:solidFill>
                   <a:srgbClr val="5E6B7C"/>
                 </a:solidFill>
                 <a:latin typeface="Calibri"/>
               </a:rPr>
-              <a:t>with live scoring, and saved history.</a:t>
-            </a:r>
-          </a:p>
-          <a:p>
-            <a:pPr algn="l">
-              <a:spcBef>
-                <a:spcPts val="797"/>
-              </a:spcBef>
-              <a:spcAft>
-                <a:spcPts val="0"/>
-              </a:spcAft>
-            </a:pPr>
-            <a:r>
-              <a:rPr sz="1450" b="0">
+              <a:t>▸ The app parses job postings and generates a word cloud from</a:t>
+            </a:r>
+          </a:p>
+          <a:p>
+            <a:pPr algn="l">
+              <a:spcBef>
+                <a:spcPts val="0"/>
+              </a:spcBef>
+              <a:spcAft>
+                <a:spcPts val="0"/>
+              </a:spcAft>
+            </a:pPr>
+            <a:r>
+              <a:rPr sz="1400" b="0">
                 <a:solidFill>
                   <a:srgbClr val="5E6B7C"/>
                 </a:solidFill>
                 <a:latin typeface="Calibri"/>
               </a:rPr>
-              <a:t>▸ Real posting data — ingested from a live job-search API</a:t>
-            </a:r>
-          </a:p>
-          <a:p>
-            <a:pPr algn="l">
-              <a:spcBef>
-                <a:spcPts val="0"/>
-              </a:spcBef>
-              <a:spcAft>
-                <a:spcPts val="0"/>
-              </a:spcAft>
-            </a:pPr>
-            <a:r>
-              <a:rPr sz="1450" b="0">
+              <a:t>the user's own search parameters.</a:t>
+            </a:r>
+          </a:p>
+          <a:p>
+            <a:pPr algn="l">
+              <a:spcBef>
+                <a:spcPts val="770"/>
+              </a:spcBef>
+              <a:spcAft>
+                <a:spcPts val="0"/>
+              </a:spcAft>
+            </a:pPr>
+            <a:r>
+              <a:rPr sz="1400" b="0">
                 <a:solidFill>
                   <a:srgbClr val="5E6B7C"/>
                 </a:solidFill>
                 <a:latin typeface="Calibri"/>
               </a:rPr>
-              <a:t>rather than invented: 40 postings across 4 roles.</a:t>
-            </a:r>
-          </a:p>
-          <a:p>
-            <a:pPr algn="l">
-              <a:spcBef>
-                <a:spcPts val="797"/>
-              </a:spcBef>
-              <a:spcAft>
-                <a:spcPts val="0"/>
-              </a:spcAft>
-            </a:pPr>
-            <a:r>
-              <a:rPr sz="1450" b="0">
+              <a:t>▸ The Q&amp;A game runs on a timer with live scoring, and every</a:t>
+            </a:r>
+          </a:p>
+          <a:p>
+            <a:pPr algn="l">
+              <a:spcBef>
+                <a:spcPts val="0"/>
+              </a:spcBef>
+              <a:spcAft>
+                <a:spcPts val="0"/>
+              </a:spcAft>
+            </a:pPr>
+            <a:r>
+              <a:rPr sz="1400" b="0">
                 <a:solidFill>
                   <a:srgbClr val="5E6B7C"/>
                 </a:solidFill>
                 <a:latin typeface="Calibri"/>
               </a:rPr>
-              <a:t>▸ The question bank beat its own target. We aimed for 10 per</a:t>
-            </a:r>
-          </a:p>
-          <a:p>
-            <a:pPr algn="l">
-              <a:spcBef>
-                <a:spcPts val="0"/>
-              </a:spcBef>
-              <a:spcAft>
-                <a:spcPts val="0"/>
-              </a:spcAft>
-            </a:pPr>
-            <a:r>
-              <a:rPr sz="1450" b="0">
+              <a:t>result is saved to the account.</a:t>
+            </a:r>
+          </a:p>
+          <a:p>
+            <a:pPr algn="l">
+              <a:spcBef>
+                <a:spcPts val="770"/>
+              </a:spcBef>
+              <a:spcAft>
+                <a:spcPts val="0"/>
+              </a:spcAft>
+            </a:pPr>
+            <a:r>
+              <a:rPr sz="1400" b="0">
                 <a:solidFill>
                   <a:srgbClr val="5E6B7C"/>
                 </a:solidFill>
                 <a:latin typeface="Calibri"/>
               </a:rPr>
-              <a:t>skill per difficulty and shipped 15 — 1,260 questions.</a:t>
-            </a:r>
-          </a:p>
-          <a:p>
-            <a:pPr algn="l">
-              <a:spcBef>
-                <a:spcPts val="797"/>
-              </a:spcBef>
-              <a:spcAft>
-                <a:spcPts val="0"/>
-              </a:spcAft>
-            </a:pPr>
-            <a:r>
-              <a:rPr sz="1450" b="0">
+              <a:t>▸ The question bank beat its target: 15 per skill per difficulty,</a:t>
+            </a:r>
+          </a:p>
+          <a:p>
+            <a:pPr algn="l">
+              <a:spcBef>
+                <a:spcPts val="0"/>
+              </a:spcBef>
+              <a:spcAft>
+                <a:spcPts val="0"/>
+              </a:spcAft>
+            </a:pPr>
+            <a:r>
+              <a:rPr sz="1400" b="0">
                 <a:solidFill>
                   <a:srgbClr val="5E6B7C"/>
                 </a:solidFill>
                 <a:latin typeface="Calibri"/>
               </a:rPr>
-              <a:t>▸ 237 automated tests with CI on every pull request. 189</a:t>
-            </a:r>
-          </a:p>
-          <a:p>
-            <a:pPr algn="l">
-              <a:spcBef>
-                <a:spcPts val="0"/>
-              </a:spcBef>
-              <a:spcAft>
-                <a:spcPts val="0"/>
-              </a:spcAft>
-            </a:pPr>
-            <a:r>
-              <a:rPr sz="1450" b="0">
+              <a:t>which is 1,260 questions across 28 skills.</a:t>
+            </a:r>
+          </a:p>
+          <a:p>
+            <a:pPr algn="l">
+              <a:spcBef>
+                <a:spcPts val="770"/>
+              </a:spcBef>
+              <a:spcAft>
+                <a:spcPts val="0"/>
+              </a:spcAft>
+            </a:pPr>
+            <a:r>
+              <a:rPr sz="1400" b="0">
                 <a:solidFill>
                   <a:srgbClr val="5E6B7C"/>
                 </a:solidFill>
                 <a:latin typeface="Calibri"/>
               </a:rPr>
-              <a:t>commits, 44 reviewed pull requests.</a:t>
+              <a:t>▸ 237 automated tests, run on every pull request.</a:t>
             </a:r>
           </a:p>
         </p:txBody>
@@ -8948,7 +8924,7 @@
         <p:spPr>
           <a:xfrm>
             <a:off x="6233007" y="1955546"/>
-            <a:ext cx="5300319" cy="3718687"/>
+            <a:ext cx="5300319" cy="3834892"/>
           </a:xfrm>
           <a:prstGeom prst="roundRect">
             <a:avLst>
@@ -8982,7 +8958,7 @@
         <p:spPr>
           <a:xfrm>
             <a:off x="6233007" y="1955546"/>
-            <a:ext cx="50292" cy="3718687"/>
+            <a:ext cx="50292" cy="3834892"/>
           </a:xfrm>
           <a:prstGeom prst="rect">
             <a:avLst/>
@@ -9054,7 +9030,7 @@
         <p:spPr>
           <a:xfrm>
             <a:off x="6521043" y="2563114"/>
-            <a:ext cx="4847691" cy="2920619"/>
+            <a:ext cx="4847691" cy="3036824"/>
           </a:xfrm>
           <a:prstGeom prst="rect">
             <a:avLst/>
@@ -9076,184 +9052,184 @@
               </a:spcAft>
             </a:pPr>
             <a:r>
-              <a:rPr sz="1450" b="0">
+              <a:rPr sz="1400" b="0">
                 <a:solidFill>
                   <a:srgbClr val="5E6B7C"/>
                 </a:solidFill>
                 <a:latin typeface="Calibri"/>
               </a:rPr>
-              <a:t>▸ The prep roadmap has a finished, tested API and no screen.</a:t>
-            </a:r>
-          </a:p>
-          <a:p>
-            <a:pPr algn="l">
-              <a:spcBef>
-                <a:spcPts val="0"/>
-              </a:spcBef>
-              <a:spcAft>
-                <a:spcPts val="0"/>
-              </a:spcAft>
-            </a:pPr>
-            <a:r>
-              <a:rPr sz="1450" b="0">
+              <a:t>▸ Users were originally going to type in any role. External API</a:t>
+            </a:r>
+          </a:p>
+          <a:p>
+            <a:pPr algn="l">
+              <a:spcBef>
+                <a:spcPts val="0"/>
+              </a:spcBef>
+              <a:spcAft>
+                <a:spcPts val="0"/>
+              </a:spcAft>
+            </a:pPr>
+            <a:r>
+              <a:rPr sz="1400" b="0">
                 <a:solidFill>
                   <a:srgbClr val="5E6B7C"/>
                 </a:solidFill>
                 <a:latin typeface="Calibri"/>
               </a:rPr>
-              <a:t>With the time left we chose to make the quiz good rather than</a:t>
-            </a:r>
-          </a:p>
-          <a:p>
-            <a:pPr algn="l">
-              <a:spcBef>
-                <a:spcPts val="0"/>
-              </a:spcBef>
-              <a:spcAft>
-                <a:spcPts val="0"/>
-              </a:spcAft>
-            </a:pPr>
-            <a:r>
-              <a:rPr sz="1450" b="0">
+              <a:t>limitations reduced that to 4 supported roles.</a:t>
+            </a:r>
+          </a:p>
+          <a:p>
+            <a:pPr algn="l">
+              <a:spcBef>
+                <a:spcPts val="770"/>
+              </a:spcBef>
+              <a:spcAft>
+                <a:spcPts val="0"/>
+              </a:spcAft>
+            </a:pPr>
+            <a:r>
+              <a:rPr sz="1400" b="0">
                 <a:solidFill>
                   <a:srgbClr val="5E6B7C"/>
                 </a:solidFill>
                 <a:latin typeface="Calibri"/>
               </a:rPr>
-              <a:t>make the roadmap merely exist.</a:t>
-            </a:r>
-          </a:p>
-          <a:p>
-            <a:pPr algn="l">
-              <a:spcBef>
-                <a:spcPts val="797"/>
-              </a:spcBef>
-              <a:spcAft>
-                <a:spcPts val="0"/>
-              </a:spcAft>
-            </a:pPr>
-            <a:r>
-              <a:rPr sz="1450" b="0">
+              <a:t>▸ Location became a dynamic menu, listing only places that have</a:t>
+            </a:r>
+          </a:p>
+          <a:p>
+            <a:pPr algn="l">
+              <a:spcBef>
+                <a:spcPts val="0"/>
+              </a:spcBef>
+              <a:spcAft>
+                <a:spcPts val="0"/>
+              </a:spcAft>
+            </a:pPr>
+            <a:r>
+              <a:rPr sz="1400" b="0">
                 <a:solidFill>
                   <a:srgbClr val="5E6B7C"/>
                 </a:solidFill>
                 <a:latin typeface="Calibri"/>
               </a:rPr>
-              <a:t>▸ Maximum salary: we removed the field instead of shipping a</a:t>
-            </a:r>
-          </a:p>
-          <a:p>
-            <a:pPr algn="l">
-              <a:spcBef>
-                <a:spcPts val="0"/>
-              </a:spcBef>
-              <a:spcAft>
-                <a:spcPts val="0"/>
-              </a:spcAft>
-            </a:pPr>
-            <a:r>
-              <a:rPr sz="1450" b="0">
+              <a:t>enough postings to build a cloud from.</a:t>
+            </a:r>
+          </a:p>
+          <a:p>
+            <a:pPr algn="l">
+              <a:spcBef>
+                <a:spcPts val="770"/>
+              </a:spcBef>
+              <a:spcAft>
+                <a:spcPts val="0"/>
+              </a:spcAft>
+            </a:pPr>
+            <a:r>
+              <a:rPr sz="1400" b="0">
                 <a:solidFill>
                   <a:srgbClr val="5E6B7C"/>
                 </a:solidFill>
                 <a:latin typeface="Calibri"/>
               </a:rPr>
-              <a:t>filter that quietly did nothing. Minimum salary works.</a:t>
-            </a:r>
-          </a:p>
-          <a:p>
-            <a:pPr algn="l">
-              <a:spcBef>
-                <a:spcPts val="797"/>
-              </a:spcBef>
-              <a:spcAft>
-                <a:spcPts val="0"/>
-              </a:spcAft>
-            </a:pPr>
-            <a:r>
-              <a:rPr sz="1450" b="0">
+              <a:t>▸ Maximum salary was removed rather than shipped as a filter</a:t>
+            </a:r>
+          </a:p>
+          <a:p>
+            <a:pPr algn="l">
+              <a:spcBef>
+                <a:spcPts val="0"/>
+              </a:spcBef>
+              <a:spcAft>
+                <a:spcPts val="0"/>
+              </a:spcAft>
+            </a:pPr>
+            <a:r>
+              <a:rPr sz="1400" b="0">
                 <a:solidFill>
                   <a:srgbClr val="5E6B7C"/>
                 </a:solidFill>
                 <a:latin typeface="Calibri"/>
               </a:rPr>
-              <a:t>▸ Named ranks are described on our rules page, but scoring</a:t>
-            </a:r>
-          </a:p>
-          <a:p>
-            <a:pPr algn="l">
-              <a:spcBef>
-                <a:spcPts val="0"/>
-              </a:spcBef>
-              <a:spcAft>
-                <a:spcPts val="0"/>
-              </a:spcAft>
-            </a:pPr>
-            <a:r>
-              <a:rPr sz="1450" b="0">
+              <a:t>that quietly did nothing.</a:t>
+            </a:r>
+          </a:p>
+          <a:p>
+            <a:pPr algn="l">
+              <a:spcBef>
+                <a:spcPts val="770"/>
+              </a:spcBef>
+              <a:spcAft>
+                <a:spcPts val="0"/>
+              </a:spcAft>
+            </a:pPr>
+            <a:r>
+              <a:rPr sz="1400" b="0">
                 <a:solidFill>
                   <a:srgbClr val="5E6B7C"/>
                 </a:solidFill>
                 <a:latin typeface="Calibri"/>
               </a:rPr>
-              <a:t>currently ends at a normalised number. The docs got ahead of</a:t>
-            </a:r>
-          </a:p>
-          <a:p>
-            <a:pPr algn="l">
-              <a:spcBef>
-                <a:spcPts val="0"/>
-              </a:spcBef>
-              <a:spcAft>
-                <a:spcPts val="0"/>
-              </a:spcAft>
-            </a:pPr>
-            <a:r>
-              <a:rPr sz="1450" b="0">
+              <a:t>▸ The prep roadmap has a finished, tested API but no screen - we</a:t>
+            </a:r>
+          </a:p>
+          <a:p>
+            <a:pPr algn="l">
+              <a:spcBef>
+                <a:spcPts val="0"/>
+              </a:spcBef>
+              <a:spcAft>
+                <a:spcPts val="0"/>
+              </a:spcAft>
+            </a:pPr>
+            <a:r>
+              <a:rPr sz="1400" b="0">
                 <a:solidFill>
                   <a:srgbClr val="5E6B7C"/>
                 </a:solidFill>
                 <a:latin typeface="Calibri"/>
               </a:rPr>
-              <a:t>the app.</a:t>
-            </a:r>
-          </a:p>
-          <a:p>
-            <a:pPr algn="l">
-              <a:spcBef>
-                <a:spcPts val="797"/>
-              </a:spcBef>
-              <a:spcAft>
-                <a:spcPts val="0"/>
-              </a:spcAft>
-            </a:pPr>
-            <a:r>
-              <a:rPr sz="1450" b="0">
+              <a:t>chose to finish the quiz instead.</a:t>
+            </a:r>
+          </a:p>
+          <a:p>
+            <a:pPr algn="l">
+              <a:spcBef>
+                <a:spcPts val="770"/>
+              </a:spcBef>
+              <a:spcAft>
+                <a:spcPts val="0"/>
+              </a:spcAft>
+            </a:pPr>
+            <a:r>
+              <a:rPr sz="1400" b="0">
                 <a:solidFill>
                   <a:srgbClr val="5E6B7C"/>
                 </a:solidFill>
                 <a:latin typeface="Calibri"/>
               </a:rPr>
-              <a:t>▸ Word clouds ended up behind sign-in, so every search could</a:t>
-            </a:r>
-          </a:p>
-          <a:p>
-            <a:pPr algn="l">
-              <a:spcBef>
-                <a:spcPts val="0"/>
-              </a:spcBef>
-              <a:spcAft>
-                <a:spcPts val="0"/>
-              </a:spcAft>
-            </a:pPr>
-            <a:r>
-              <a:rPr sz="1450" b="0">
+              <a:t>▸ Named ranks are on the rules page, but scoring currently ends</a:t>
+            </a:r>
+          </a:p>
+          <a:p>
+            <a:pPr algn="l">
+              <a:spcBef>
+                <a:spcPts val="0"/>
+              </a:spcBef>
+              <a:spcAft>
+                <a:spcPts val="0"/>
+              </a:spcAft>
+            </a:pPr>
+            <a:r>
+              <a:rPr sz="1400" b="0">
                 <a:solidFill>
                   <a:srgbClr val="5E6B7C"/>
                 </a:solidFill>
                 <a:latin typeface="Calibri"/>
               </a:rPr>
-              <a:t>be saved to a real account and offered back.</a:t>
+              <a:t>at a normalised number.</a:t>
             </a:r>
           </a:p>
         </p:txBody>
@@ -10504,7 +10480,7 @@
                 </a:solidFill>
                 <a:latin typeface="Calibri"/>
               </a:rPr>
-              <a:t>THE GOAL</a:t>
+              <a:t>APPLICATION GOAL</a:t>
             </a:r>
           </a:p>
         </p:txBody>
@@ -10637,7 +10613,7 @@
                 </a:solidFill>
                 <a:latin typeface="Calibri"/>
               </a:rPr>
-              <a:t>board and finds forty postings for the same title —</a:t>
+              <a:t>board and finds forty postings for the same title -</a:t>
             </a:r>
           </a:p>
           <a:p>
@@ -10670,7 +10646,7 @@
         <p:spPr>
           <a:xfrm>
             <a:off x="658368" y="2676905"/>
-            <a:ext cx="5282031" cy="588772"/>
+            <a:ext cx="5282031" cy="1177544"/>
           </a:xfrm>
           <a:prstGeom prst="rect">
             <a:avLst/>
@@ -10720,29 +10696,6 @@
               <a:t>signal is real, it is public, and it is completely buried.</a:t>
             </a:r>
           </a:p>
-        </p:txBody>
-      </p:sp>
-      <p:sp>
-        <p:nvSpPr>
-          <p:cNvPr id="8" name="TextBox 7"/>
-          <p:cNvSpPr txBox="1"/>
-          <p:nvPr/>
-        </p:nvSpPr>
-        <p:spPr>
-          <a:xfrm>
-            <a:off x="658368" y="3468877"/>
-            <a:ext cx="5282031" cy="588772"/>
-          </a:xfrm>
-          <a:prstGeom prst="rect">
-            <a:avLst/>
-          </a:prstGeom>
-          <a:noFill/>
-        </p:spPr>
-        <p:txBody>
-          <a:bodyPr wrap="square" lIns="0" rIns="0" tIns="0" bIns="0" anchor="t">
-            <a:spAutoFit/>
-          </a:bodyPr>
-          <a:lstStyle/>
           <a:p>
             <a:pPr algn="l">
               <a:spcBef>
@@ -10778,21 +10731,21 @@
                 </a:solidFill>
                 <a:latin typeface="Calibri"/>
               </a:rPr>
-              <a:t>actually does. So people guess at what to learn next.</a:t>
-            </a:r>
-          </a:p>
-        </p:txBody>
-      </p:sp>
-      <p:sp>
-        <p:nvSpPr>
-          <p:cNvPr id="9" name="Rounded Rectangle 8"/>
+              <a:t>actually does, so people guess at what to learn next.</a:t>
+            </a:r>
+          </a:p>
+        </p:txBody>
+      </p:sp>
+      <p:sp>
+        <p:nvSpPr>
+          <p:cNvPr id="8" name="Rounded Rectangle 7"/>
           <p:cNvSpPr/>
           <p:nvPr/>
         </p:nvSpPr>
         <p:spPr>
           <a:xfrm>
             <a:off x="6251295" y="1590548"/>
-            <a:ext cx="5282031" cy="1448816"/>
+            <a:ext cx="5282031" cy="2192528"/>
           </a:xfrm>
           <a:prstGeom prst="roundRect">
             <a:avLst>
@@ -10819,14 +10772,14 @@
       </p:sp>
       <p:sp>
         <p:nvSpPr>
-          <p:cNvPr id="10" name="Rectangle 9"/>
+          <p:cNvPr id="9" name="Rectangle 8"/>
           <p:cNvSpPr/>
           <p:nvPr/>
         </p:nvSpPr>
         <p:spPr>
           <a:xfrm>
             <a:off x="6251295" y="1590548"/>
-            <a:ext cx="50292" cy="1448816"/>
+            <a:ext cx="50292" cy="2192528"/>
           </a:xfrm>
           <a:prstGeom prst="rect">
             <a:avLst/>
@@ -10849,7 +10802,7 @@
       </p:sp>
       <p:sp>
         <p:nvSpPr>
-          <p:cNvPr id="11" name="TextBox 10"/>
+          <p:cNvPr id="10" name="TextBox 9"/>
           <p:cNvSpPr txBox="1"/>
           <p:nvPr/>
         </p:nvSpPr>
@@ -10884,21 +10837,21 @@
                 </a:solidFill>
                 <a:latin typeface="Calibri"/>
               </a:rPr>
-              <a:t>What JobHopper does</a:t>
-            </a:r>
-          </a:p>
-        </p:txBody>
-      </p:sp>
-      <p:sp>
-        <p:nvSpPr>
-          <p:cNvPr id="12" name="TextBox 11"/>
+              <a:t>What we set out to build</a:t>
+            </a:r>
+          </a:p>
+        </p:txBody>
+      </p:sp>
+      <p:sp>
+        <p:nvSpPr>
+          <p:cNvPr id="11" name="TextBox 10"/>
           <p:cNvSpPr txBox="1"/>
           <p:nvPr/>
         </p:nvSpPr>
         <p:spPr>
           <a:xfrm>
             <a:off x="6539331" y="2151634"/>
-            <a:ext cx="4829403" cy="697230"/>
+            <a:ext cx="4829403" cy="1440942"/>
           </a:xfrm>
           <a:prstGeom prst="rect">
             <a:avLst/>
@@ -10920,231 +10873,121 @@
               </a:spcAft>
             </a:pPr>
             <a:r>
-              <a:rPr sz="1500" b="0">
+              <a:rPr sz="1550" b="0">
                 <a:solidFill>
                   <a:srgbClr val="5E6B7C"/>
                 </a:solidFill>
                 <a:latin typeface="Calibri"/>
               </a:rPr>
-              <a:t>Reads the current postings for a role and draws the tools</a:t>
-            </a:r>
-          </a:p>
-          <a:p>
-            <a:pPr algn="l">
-              <a:spcBef>
-                <a:spcPts val="0"/>
-              </a:spcBef>
-              <a:spcAft>
-                <a:spcPts val="0"/>
-              </a:spcAft>
-            </a:pPr>
-            <a:r>
-              <a:rPr sz="1500" b="0">
+              <a:t>JobHopper's goal is to analyze job postings for a target</a:t>
+            </a:r>
+          </a:p>
+          <a:p>
+            <a:pPr algn="l">
+              <a:spcBef>
+                <a:spcPts val="0"/>
+              </a:spcBef>
+              <a:spcAft>
+                <a:spcPts val="0"/>
+              </a:spcAft>
+            </a:pPr>
+            <a:r>
+              <a:rPr sz="1550" b="0">
                 <a:solidFill>
                   <a:srgbClr val="5E6B7C"/>
                 </a:solidFill>
                 <a:latin typeface="Calibri"/>
               </a:rPr>
-              <a:t>and skills sized by how many of those postings actually</a:t>
-            </a:r>
-          </a:p>
-          <a:p>
-            <a:pPr algn="l">
-              <a:spcBef>
-                <a:spcPts val="0"/>
-              </a:spcBef>
-              <a:spcAft>
-                <a:spcPts val="0"/>
-              </a:spcAft>
-            </a:pPr>
-            <a:r>
-              <a:rPr sz="1500" b="0">
+              <a:t>role, identify the most in-demand skills in the job market</a:t>
+            </a:r>
+          </a:p>
+          <a:p>
+            <a:pPr algn="l">
+              <a:spcBef>
+                <a:spcPts val="0"/>
+              </a:spcBef>
+              <a:spcAft>
+                <a:spcPts val="0"/>
+              </a:spcAft>
+            </a:pPr>
+            <a:r>
+              <a:rPr sz="1550" b="0">
                 <a:solidFill>
                   <a:srgbClr val="5E6B7C"/>
                 </a:solidFill>
                 <a:latin typeface="Calibri"/>
               </a:rPr>
-              <a:t>mention them.</a:t>
-            </a:r>
-          </a:p>
-        </p:txBody>
-      </p:sp>
-      <p:sp>
-        <p:nvSpPr>
-          <p:cNvPr id="13" name="Rounded Rectangle 12"/>
+              <a:t>for that role, and present those findings to the user</a:t>
+            </a:r>
+          </a:p>
+          <a:p>
+            <a:pPr algn="l">
+              <a:spcBef>
+                <a:spcPts val="0"/>
+              </a:spcBef>
+              <a:spcAft>
+                <a:spcPts val="0"/>
+              </a:spcAft>
+            </a:pPr>
+            <a:r>
+              <a:rPr sz="1550" b="0">
+                <a:solidFill>
+                  <a:srgbClr val="5E6B7C"/>
+                </a:solidFill>
+                <a:latin typeface="Calibri"/>
+              </a:rPr>
+              <a:t>through a word cloud visual. Additionally, JobHopper aims</a:t>
+            </a:r>
+          </a:p>
+          <a:p>
+            <a:pPr algn="l">
+              <a:spcBef>
+                <a:spcPts val="0"/>
+              </a:spcBef>
+              <a:spcAft>
+                <a:spcPts val="0"/>
+              </a:spcAft>
+            </a:pPr>
+            <a:r>
+              <a:rPr sz="1550" b="0">
+                <a:solidFill>
+                  <a:srgbClr val="5E6B7C"/>
+                </a:solidFill>
+                <a:latin typeface="Calibri"/>
+              </a:rPr>
+              <a:t>to help people build those skills through interactive Q&amp;A</a:t>
+            </a:r>
+          </a:p>
+          <a:p>
+            <a:pPr algn="l">
+              <a:spcBef>
+                <a:spcPts val="0"/>
+              </a:spcBef>
+              <a:spcAft>
+                <a:spcPts val="0"/>
+              </a:spcAft>
+            </a:pPr>
+            <a:r>
+              <a:rPr sz="1550" b="0">
+                <a:solidFill>
+                  <a:srgbClr val="5E6B7C"/>
+                </a:solidFill>
+                <a:latin typeface="Calibri"/>
+              </a:rPr>
+              <a:t>games.</a:t>
+            </a:r>
+          </a:p>
+        </p:txBody>
+      </p:sp>
+      <p:sp>
+        <p:nvSpPr>
+          <p:cNvPr id="12" name="Rounded Rectangle 11"/>
           <p:cNvSpPr/>
           <p:nvPr/>
         </p:nvSpPr>
         <p:spPr>
           <a:xfrm>
-            <a:off x="6251295" y="3240532"/>
-            <a:ext cx="5282031" cy="1216406"/>
-          </a:xfrm>
-          <a:prstGeom prst="roundRect">
-            <a:avLst>
-              <a:gd name="adj" fmla="val 5500"/>
-            </a:avLst>
-          </a:prstGeom>
-          <a:solidFill>
-            <a:srgbClr val="FFFFFF"/>
-          </a:solidFill>
-          <a:ln w="15875">
-            <a:solidFill>
-              <a:srgbClr val="C9D2DE"/>
-            </a:solidFill>
-          </a:ln>
-          <a:effectLst/>
-        </p:spPr>
-        <p:txBody>
-          <a:bodyPr rtlCol="0" anchor="ctr" wrap="square" lIns="0" rIns="0" tIns="0" bIns="0"/>
-          <a:lstStyle/>
-          <a:p>
-            <a:pPr algn="ctr"/>
-          </a:p>
-        </p:txBody>
-      </p:sp>
-      <p:sp>
-        <p:nvSpPr>
-          <p:cNvPr id="14" name="Rectangle 13"/>
-          <p:cNvSpPr/>
-          <p:nvPr/>
-        </p:nvSpPr>
-        <p:spPr>
-          <a:xfrm>
-            <a:off x="6251295" y="3240532"/>
-            <a:ext cx="50292" cy="1216406"/>
-          </a:xfrm>
-          <a:prstGeom prst="rect">
-            <a:avLst/>
-          </a:prstGeom>
-          <a:solidFill>
-            <a:srgbClr val="9A4F70"/>
-          </a:solidFill>
-          <a:ln>
-            <a:noFill/>
-          </a:ln>
-          <a:effectLst/>
-        </p:spPr>
-        <p:txBody>
-          <a:bodyPr rtlCol="0" anchor="ctr" wrap="square" lIns="0" rIns="0" tIns="0" bIns="0"/>
-          <a:lstStyle/>
-          <a:p>
-            <a:pPr algn="ctr"/>
-          </a:p>
-        </p:txBody>
-      </p:sp>
-      <p:sp>
-        <p:nvSpPr>
-          <p:cNvPr id="15" name="TextBox 14"/>
-          <p:cNvSpPr txBox="1"/>
-          <p:nvPr/>
-        </p:nvSpPr>
-        <p:spPr>
-          <a:xfrm>
-            <a:off x="6539331" y="3405632"/>
-            <a:ext cx="4829403" cy="294386"/>
-          </a:xfrm>
-          <a:prstGeom prst="rect">
-            <a:avLst/>
-          </a:prstGeom>
-          <a:noFill/>
-        </p:spPr>
-        <p:txBody>
-          <a:bodyPr wrap="square" lIns="0" rIns="0" tIns="0" bIns="0" anchor="t">
-            <a:spAutoFit/>
-          </a:bodyPr>
-          <a:lstStyle/>
-          <a:p>
-            <a:pPr algn="l">
-              <a:spcBef>
-                <a:spcPts val="0"/>
-              </a:spcBef>
-              <a:spcAft>
-                <a:spcPts val="0"/>
-              </a:spcAft>
-            </a:pPr>
-            <a:r>
-              <a:rPr sz="1900" b="1">
-                <a:solidFill>
-                  <a:srgbClr val="1B2430"/>
-                </a:solidFill>
-                <a:latin typeface="Calibri"/>
-              </a:rPr>
-              <a:t>And then makes it actionable</a:t>
-            </a:r>
-          </a:p>
-        </p:txBody>
-      </p:sp>
-      <p:sp>
-        <p:nvSpPr>
-          <p:cNvPr id="16" name="TextBox 15"/>
-          <p:cNvSpPr txBox="1"/>
-          <p:nvPr/>
-        </p:nvSpPr>
-        <p:spPr>
-          <a:xfrm>
-            <a:off x="6539331" y="3801618"/>
-            <a:ext cx="4829403" cy="464820"/>
-          </a:xfrm>
-          <a:prstGeom prst="rect">
-            <a:avLst/>
-          </a:prstGeom>
-          <a:noFill/>
-        </p:spPr>
-        <p:txBody>
-          <a:bodyPr wrap="square" lIns="0" rIns="0" tIns="0" bIns="0" anchor="t">
-            <a:spAutoFit/>
-          </a:bodyPr>
-          <a:lstStyle/>
-          <a:p>
-            <a:pPr algn="l">
-              <a:spcBef>
-                <a:spcPts val="0"/>
-              </a:spcBef>
-              <a:spcAft>
-                <a:spcPts val="0"/>
-              </a:spcAft>
-            </a:pPr>
-            <a:r>
-              <a:rPr sz="1500" b="0">
-                <a:solidFill>
-                  <a:srgbClr val="5E6B7C"/>
-                </a:solidFill>
-                <a:latin typeface="Calibri"/>
-              </a:rPr>
-              <a:t>Every skill in that picture is clickable. Click it and you are in a</a:t>
-            </a:r>
-          </a:p>
-          <a:p>
-            <a:pPr algn="l">
-              <a:spcBef>
-                <a:spcPts val="0"/>
-              </a:spcBef>
-              <a:spcAft>
-                <a:spcPts val="0"/>
-              </a:spcAft>
-            </a:pPr>
-            <a:r>
-              <a:rPr sz="1500" b="0">
-                <a:solidFill>
-                  <a:srgbClr val="5E6B7C"/>
-                </a:solidFill>
-                <a:latin typeface="Calibri"/>
-              </a:rPr>
-              <a:t>timed, multiple-choice quiz on that exact skill.</a:t>
-            </a:r>
-          </a:p>
-        </p:txBody>
-      </p:sp>
-      <p:sp>
-        <p:nvSpPr>
-          <p:cNvPr id="17" name="Rounded Rectangle 16"/>
-          <p:cNvSpPr/>
-          <p:nvPr/>
-        </p:nvSpPr>
-        <p:spPr>
-          <a:xfrm>
-            <a:off x="658368" y="4804410"/>
+            <a:off x="658368" y="4258817"/>
             <a:ext cx="10874959" cy="624586"/>
           </a:xfrm>
           <a:prstGeom prst="roundRect">
@@ -11170,13 +11013,13 @@
       </p:sp>
       <p:sp>
         <p:nvSpPr>
-          <p:cNvPr id="18" name="TextBox 17"/>
+          <p:cNvPr id="13" name="TextBox 12"/>
           <p:cNvSpPr txBox="1"/>
           <p:nvPr/>
         </p:nvSpPr>
         <p:spPr>
           <a:xfrm>
-            <a:off x="969264" y="4969510"/>
+            <a:off x="969264" y="4423917"/>
             <a:ext cx="10253167" cy="294386"/>
           </a:xfrm>
           <a:prstGeom prst="rect">
@@ -11205,14 +11048,14 @@
                 </a:solidFill>
                 <a:latin typeface="Calibri"/>
               </a:rPr>
-              <a:t>In one sentence: show people what the market is asking for, and give them a way to practise it.</a:t>
-            </a:r>
-          </a:p>
-        </p:txBody>
-      </p:sp>
-      <p:sp>
-        <p:nvSpPr>
-          <p:cNvPr id="19" name="TextBox 18"/>
+              <a:t>And every skill in that picture is clickable - click it and you are in a timed quiz on that exact skill.</a:t>
+            </a:r>
+          </a:p>
+        </p:txBody>
+      </p:sp>
+      <p:sp>
+        <p:nvSpPr>
+          <p:cNvPr id="14" name="TextBox 13"/>
           <p:cNvSpPr txBox="1"/>
           <p:nvPr/>
         </p:nvSpPr>
@@ -11254,7 +11097,7 @@
       </p:sp>
       <p:sp>
         <p:nvSpPr>
-          <p:cNvPr id="20" name="TextBox 19"/>
+          <p:cNvPr id="15" name="TextBox 14"/>
           <p:cNvSpPr txBox="1"/>
           <p:nvPr/>
         </p:nvSpPr>
@@ -11421,62 +11264,20 @@
                 </a:solidFill>
                 <a:latin typeface="Calibri"/>
               </a:rPr>
-              <a:t>What the system has to do</a:t>
-            </a:r>
-          </a:p>
-        </p:txBody>
-      </p:sp>
-      <p:sp>
-        <p:nvSpPr>
-          <p:cNvPr id="5" name="TextBox 4"/>
-          <p:cNvSpPr txBox="1"/>
+              <a:t>Accounts, and building the word cloud</a:t>
+            </a:r>
+          </a:p>
+        </p:txBody>
+      </p:sp>
+      <p:sp>
+        <p:nvSpPr>
+          <p:cNvPr id="5" name="Rectangle 4"/>
+          <p:cNvSpPr/>
           <p:nvPr/>
         </p:nvSpPr>
         <p:spPr>
           <a:xfrm>
             <a:off x="658368" y="1316228"/>
-            <a:ext cx="10874959" cy="263398"/>
-          </a:xfrm>
-          <a:prstGeom prst="rect">
-            <a:avLst/>
-          </a:prstGeom>
-          <a:noFill/>
-        </p:spPr>
-        <p:txBody>
-          <a:bodyPr wrap="square" lIns="0" rIns="0" tIns="0" bIns="0" anchor="t">
-            <a:spAutoFit/>
-          </a:bodyPr>
-          <a:lstStyle/>
-          <a:p>
-            <a:pPr algn="l">
-              <a:spcBef>
-                <a:spcPts val="0"/>
-              </a:spcBef>
-              <a:spcAft>
-                <a:spcPts val="0"/>
-              </a:spcAft>
-            </a:pPr>
-            <a:r>
-              <a:rPr sz="1700" b="0">
-                <a:solidFill>
-                  <a:srgbClr val="5E6B7C"/>
-                </a:solidFill>
-                <a:latin typeface="Calibri"/>
-              </a:rPr>
-              <a:t>Everything below is built and demonstrable unless it carries a flag.</a:t>
-            </a:r>
-          </a:p>
-        </p:txBody>
-      </p:sp>
-      <p:sp>
-        <p:nvSpPr>
-          <p:cNvPr id="6" name="Rectangle 5"/>
-          <p:cNvSpPr/>
-          <p:nvPr/>
-        </p:nvSpPr>
-        <p:spPr>
-          <a:xfrm>
-            <a:off x="658368" y="1681226"/>
             <a:ext cx="1325880" cy="44450"/>
           </a:xfrm>
           <a:prstGeom prst="rect">
@@ -11500,14 +11301,14 @@
       </p:sp>
       <p:sp>
         <p:nvSpPr>
-          <p:cNvPr id="7" name="Rounded Rectangle 6"/>
+          <p:cNvPr id="6" name="Rounded Rectangle 5"/>
           <p:cNvSpPr/>
           <p:nvPr/>
         </p:nvSpPr>
         <p:spPr>
           <a:xfrm>
-            <a:off x="658368" y="1955546"/>
-            <a:ext cx="5300319" cy="1619250"/>
+            <a:off x="658368" y="1590548"/>
+            <a:ext cx="5300319" cy="3370072"/>
           </a:xfrm>
           <a:prstGeom prst="roundRect">
             <a:avLst>
@@ -11534,14 +11335,14 @@
       </p:sp>
       <p:sp>
         <p:nvSpPr>
-          <p:cNvPr id="8" name="Rectangle 7"/>
+          <p:cNvPr id="7" name="Rectangle 6"/>
           <p:cNvSpPr/>
           <p:nvPr/>
         </p:nvSpPr>
         <p:spPr>
           <a:xfrm>
-            <a:off x="658368" y="1955546"/>
-            <a:ext cx="50292" cy="1619250"/>
+            <a:off x="658368" y="1590548"/>
+            <a:ext cx="50292" cy="3370072"/>
           </a:xfrm>
           <a:prstGeom prst="rect">
             <a:avLst/>
@@ -11564,14 +11365,14 @@
       </p:sp>
       <p:sp>
         <p:nvSpPr>
-          <p:cNvPr id="9" name="TextBox 8"/>
+          <p:cNvPr id="8" name="TextBox 7"/>
           <p:cNvSpPr txBox="1"/>
           <p:nvPr/>
         </p:nvSpPr>
         <p:spPr>
           <a:xfrm>
-            <a:off x="946404" y="2120646"/>
-            <a:ext cx="4847691" cy="294386"/>
+            <a:off x="946404" y="1755648"/>
+            <a:ext cx="4847691" cy="309880"/>
           </a:xfrm>
           <a:prstGeom prst="rect">
             <a:avLst/>
@@ -11593,27 +11394,27 @@
               </a:spcAft>
             </a:pPr>
             <a:r>
-              <a:rPr sz="1900" b="1">
+              <a:rPr sz="2000" b="1">
                 <a:solidFill>
                   <a:srgbClr val="1B2430"/>
                 </a:solidFill>
                 <a:latin typeface="Calibri"/>
               </a:rPr>
-              <a:t>FR1 · Accounts</a:t>
-            </a:r>
-          </a:p>
-        </p:txBody>
-      </p:sp>
-      <p:sp>
-        <p:nvSpPr>
-          <p:cNvPr id="10" name="TextBox 9"/>
+              <a:t>User registration and login</a:t>
+            </a:r>
+          </a:p>
+        </p:txBody>
+      </p:sp>
+      <p:sp>
+        <p:nvSpPr>
+          <p:cNvPr id="9" name="TextBox 8"/>
           <p:cNvSpPr txBox="1"/>
           <p:nvPr/>
         </p:nvSpPr>
         <p:spPr>
           <a:xfrm>
-            <a:off x="946404" y="2516632"/>
-            <a:ext cx="4847691" cy="650748"/>
+            <a:off x="946404" y="2167128"/>
+            <a:ext cx="4847691" cy="2602992"/>
           </a:xfrm>
           <a:prstGeom prst="rect">
             <a:avLst/>
@@ -11641,7 +11442,7 @@
                 </a:solidFill>
                 <a:latin typeface="Calibri"/>
               </a:rPr>
-              <a:t>Register, sign in, stay signed in, sign out. Usernames are 4–16</a:t>
+              <a:t>The system shall allow users to register an account using a</a:t>
             </a:r>
           </a:p>
           <a:p>
@@ -11660,7 +11461,7 @@
                 </a:solidFill>
                 <a:latin typeface="Calibri"/>
               </a:rPr>
-              <a:t>letters and digits; passwords 8–20 characters. A session lasts 24</a:t>
+              <a:t>username and password input, with the option to include name</a:t>
             </a:r>
           </a:p>
           <a:p>
@@ -11679,21 +11480,135 @@
                 </a:solidFill>
                 <a:latin typeface="Calibri"/>
               </a:rPr>
-              <a:t>hours.</a:t>
-            </a:r>
-          </a:p>
-        </p:txBody>
-      </p:sp>
-      <p:sp>
-        <p:nvSpPr>
-          <p:cNvPr id="11" name="Rounded Rectangle 10"/>
+              <a:t>and email.</a:t>
+            </a:r>
+          </a:p>
+          <a:p>
+            <a:pPr algn="l">
+              <a:spcBef>
+                <a:spcPts val="770"/>
+              </a:spcBef>
+              <a:spcAft>
+                <a:spcPts val="0"/>
+              </a:spcAft>
+            </a:pPr>
+            <a:r>
+              <a:rPr sz="1400" b="0">
+                <a:solidFill>
+                  <a:srgbClr val="5E6B7C"/>
+                </a:solidFill>
+                <a:latin typeface="Calibri"/>
+              </a:rPr>
+              <a:t>The system shall validate that the user's credentials are correct</a:t>
+            </a:r>
+          </a:p>
+          <a:p>
+            <a:pPr algn="l">
+              <a:spcBef>
+                <a:spcPts val="0"/>
+              </a:spcBef>
+              <a:spcAft>
+                <a:spcPts val="0"/>
+              </a:spcAft>
+            </a:pPr>
+            <a:r>
+              <a:rPr sz="1400" b="0">
+                <a:solidFill>
+                  <a:srgbClr val="5E6B7C"/>
+                </a:solidFill>
+                <a:latin typeface="Calibri"/>
+              </a:rPr>
+              <a:t>before allowing them to sign in.</a:t>
+            </a:r>
+          </a:p>
+          <a:p>
+            <a:pPr algn="l">
+              <a:spcBef>
+                <a:spcPts val="770"/>
+              </a:spcBef>
+              <a:spcAft>
+                <a:spcPts val="0"/>
+              </a:spcAft>
+            </a:pPr>
+            <a:r>
+              <a:rPr sz="1400" b="0">
+                <a:solidFill>
+                  <a:srgbClr val="5E6B7C"/>
+                </a:solidFill>
+                <a:latin typeface="Calibri"/>
+              </a:rPr>
+              <a:t>The system shall allow the user to see their most recent game</a:t>
+            </a:r>
+          </a:p>
+          <a:p>
+            <a:pPr algn="l">
+              <a:spcBef>
+                <a:spcPts val="0"/>
+              </a:spcBef>
+              <a:spcAft>
+                <a:spcPts val="0"/>
+              </a:spcAft>
+            </a:pPr>
+            <a:r>
+              <a:rPr sz="1400" b="0">
+                <a:solidFill>
+                  <a:srgbClr val="5E6B7C"/>
+                </a:solidFill>
+                <a:latin typeface="Calibri"/>
+              </a:rPr>
+              <a:t>keyword and score after the user logs in.</a:t>
+            </a:r>
+          </a:p>
+          <a:p>
+            <a:pPr algn="l">
+              <a:spcBef>
+                <a:spcPts val="770"/>
+              </a:spcBef>
+              <a:spcAft>
+                <a:spcPts val="0"/>
+              </a:spcAft>
+            </a:pPr>
+            <a:r>
+              <a:rPr sz="1400" b="0">
+                <a:solidFill>
+                  <a:srgbClr val="5E6B7C"/>
+                </a:solidFill>
+                <a:latin typeface="Calibri"/>
+              </a:rPr>
+              <a:t>The system shall allow the user to see their three most recent</a:t>
+            </a:r>
+          </a:p>
+          <a:p>
+            <a:pPr algn="l">
+              <a:spcBef>
+                <a:spcPts val="0"/>
+              </a:spcBef>
+              <a:spcAft>
+                <a:spcPts val="0"/>
+              </a:spcAft>
+            </a:pPr>
+            <a:r>
+              <a:rPr sz="1400" b="0">
+                <a:solidFill>
+                  <a:srgbClr val="5E6B7C"/>
+                </a:solidFill>
+                <a:latin typeface="Calibri"/>
+              </a:rPr>
+              <a:t>job title searches after the user logs in.</a:t>
+            </a:r>
+          </a:p>
+        </p:txBody>
+      </p:sp>
+      <p:sp>
+        <p:nvSpPr>
+          <p:cNvPr id="10" name="Rounded Rectangle 9"/>
           <p:cNvSpPr/>
           <p:nvPr/>
         </p:nvSpPr>
         <p:spPr>
           <a:xfrm>
-            <a:off x="6233007" y="1955546"/>
-            <a:ext cx="5300319" cy="1619250"/>
+            <a:off x="6233007" y="1590548"/>
+            <a:ext cx="5300319" cy="3370072"/>
           </a:xfrm>
           <a:prstGeom prst="roundRect">
             <a:avLst>
@@ -11720,14 +11635,14 @@
       </p:sp>
       <p:sp>
         <p:nvSpPr>
-          <p:cNvPr id="12" name="Rectangle 11"/>
+          <p:cNvPr id="11" name="Rectangle 10"/>
           <p:cNvSpPr/>
           <p:nvPr/>
         </p:nvSpPr>
         <p:spPr>
           <a:xfrm>
-            <a:off x="6233007" y="1955546"/>
-            <a:ext cx="50292" cy="1619250"/>
+            <a:off x="6233007" y="1590548"/>
+            <a:ext cx="50292" cy="3370072"/>
           </a:xfrm>
           <a:prstGeom prst="rect">
             <a:avLst/>
@@ -11750,14 +11665,14 @@
       </p:sp>
       <p:sp>
         <p:nvSpPr>
-          <p:cNvPr id="13" name="TextBox 12"/>
+          <p:cNvPr id="12" name="TextBox 11"/>
           <p:cNvSpPr txBox="1"/>
           <p:nvPr/>
         </p:nvSpPr>
         <p:spPr>
           <a:xfrm>
-            <a:off x="6521043" y="2120646"/>
-            <a:ext cx="4847691" cy="294386"/>
+            <a:off x="6521043" y="1755648"/>
+            <a:ext cx="4847691" cy="309880"/>
           </a:xfrm>
           <a:prstGeom prst="rect">
             <a:avLst/>
@@ -11779,27 +11694,27 @@
               </a:spcAft>
             </a:pPr>
             <a:r>
-              <a:rPr sz="1900" b="1">
+              <a:rPr sz="2000" b="1">
                 <a:solidFill>
                   <a:srgbClr val="1B2430"/>
                 </a:solidFill>
                 <a:latin typeface="Calibri"/>
               </a:rPr>
-              <a:t>FR2 · Generate a skills word cloud</a:t>
-            </a:r>
-          </a:p>
-        </p:txBody>
-      </p:sp>
-      <p:sp>
-        <p:nvSpPr>
-          <p:cNvPr id="14" name="TextBox 13"/>
+              <a:t>Word cloud creation</a:t>
+            </a:r>
+          </a:p>
+        </p:txBody>
+      </p:sp>
+      <p:sp>
+        <p:nvSpPr>
+          <p:cNvPr id="13" name="TextBox 12"/>
           <p:cNvSpPr txBox="1"/>
           <p:nvPr/>
         </p:nvSpPr>
         <p:spPr>
           <a:xfrm>
-            <a:off x="6521043" y="2516632"/>
-            <a:ext cx="4847691" cy="867663"/>
+            <a:off x="6521043" y="2167128"/>
+            <a:ext cx="4847691" cy="1952244"/>
           </a:xfrm>
           <a:prstGeom prst="rect">
             <a:avLst/>
@@ -11827,7 +11742,7 @@
                 </a:solidFill>
                 <a:latin typeface="Calibri"/>
               </a:rPr>
-              <a:t>Choose a job title, and optionally a location and a minimum</a:t>
+              <a:t>The system shall allow the user to input job search parameters</a:t>
             </a:r>
           </a:p>
           <a:p>
@@ -11846,13 +11761,13 @@
                 </a:solidFill>
                 <a:latin typeface="Calibri"/>
               </a:rPr>
-              <a:t>salary. Pick up to 40 keywords and a shape. Get back the tools</a:t>
-            </a:r>
-          </a:p>
-          <a:p>
-            <a:pPr algn="l">
-              <a:spcBef>
-                <a:spcPts val="0"/>
+              <a:t>including job title, location, and minimum salary.</a:t>
+            </a:r>
+          </a:p>
+          <a:p>
+            <a:pPr algn="l">
+              <a:spcBef>
+                <a:spcPts val="770"/>
               </a:spcBef>
               <a:spcAft>
                 <a:spcPts val="0"/>
@@ -11865,7 +11780,7 @@
                 </a:solidFill>
                 <a:latin typeface="Calibri"/>
               </a:rPr>
-              <a:t>and skills weighted by how many current postings mention each</a:t>
+              <a:t>The system shall allow the user to select word cloud</a:t>
             </a:r>
           </a:p>
           <a:p>
@@ -11884,85 +11799,78 @@
                 </a:solidFill>
                 <a:latin typeface="Calibri"/>
               </a:rPr>
-              <a:t>one.</a:t>
-            </a:r>
-          </a:p>
-        </p:txBody>
-      </p:sp>
-      <p:sp>
-        <p:nvSpPr>
-          <p:cNvPr id="15" name="Rounded Rectangle 14"/>
-          <p:cNvSpPr/>
-          <p:nvPr/>
-        </p:nvSpPr>
-        <p:spPr>
-          <a:xfrm>
-            <a:off x="658368" y="3794252"/>
-            <a:ext cx="5300319" cy="1185418"/>
-          </a:xfrm>
-          <a:prstGeom prst="roundRect">
-            <a:avLst>
-              <a:gd name="adj" fmla="val 5500"/>
-            </a:avLst>
-          </a:prstGeom>
-          <a:solidFill>
-            <a:srgbClr val="FFFFFF"/>
-          </a:solidFill>
-          <a:ln w="15875">
-            <a:solidFill>
-              <a:srgbClr val="C9D2DE"/>
-            </a:solidFill>
-          </a:ln>
-          <a:effectLst/>
-        </p:spPr>
-        <p:txBody>
-          <a:bodyPr rtlCol="0" anchor="ctr" wrap="square" lIns="0" rIns="0" tIns="0" bIns="0"/>
-          <a:lstStyle/>
-          <a:p>
-            <a:pPr algn="ctr"/>
-          </a:p>
-        </p:txBody>
-      </p:sp>
-      <p:sp>
-        <p:nvSpPr>
-          <p:cNvPr id="16" name="Rectangle 15"/>
-          <p:cNvSpPr/>
-          <p:nvPr/>
-        </p:nvSpPr>
-        <p:spPr>
-          <a:xfrm>
-            <a:off x="658368" y="3794252"/>
-            <a:ext cx="50292" cy="1185418"/>
-          </a:xfrm>
-          <a:prstGeom prst="rect">
-            <a:avLst/>
-          </a:prstGeom>
-          <a:solidFill>
-            <a:srgbClr val="3F5C99"/>
-          </a:solidFill>
-          <a:ln>
-            <a:noFill/>
-          </a:ln>
-          <a:effectLst/>
-        </p:spPr>
-        <p:txBody>
-          <a:bodyPr rtlCol="0" anchor="ctr" wrap="square" lIns="0" rIns="0" tIns="0" bIns="0"/>
-          <a:lstStyle/>
-          <a:p>
-            <a:pPr algn="ctr"/>
-          </a:p>
-        </p:txBody>
-      </p:sp>
-      <p:sp>
-        <p:nvSpPr>
-          <p:cNvPr id="17" name="TextBox 16"/>
+              <a:t>configurations such as shape and number of words.</a:t>
+            </a:r>
+          </a:p>
+          <a:p>
+            <a:pPr algn="l">
+              <a:spcBef>
+                <a:spcPts val="770"/>
+              </a:spcBef>
+              <a:spcAft>
+                <a:spcPts val="0"/>
+              </a:spcAft>
+            </a:pPr>
+            <a:r>
+              <a:rPr sz="1400" b="0">
+                <a:solidFill>
+                  <a:srgbClr val="5E6B7C"/>
+                </a:solidFill>
+                <a:latin typeface="Calibri"/>
+              </a:rPr>
+              <a:t>The system shall generate a word cloud where the size of each</a:t>
+            </a:r>
+          </a:p>
+          <a:p>
+            <a:pPr algn="l">
+              <a:spcBef>
+                <a:spcPts val="0"/>
+              </a:spcBef>
+              <a:spcAft>
+                <a:spcPts val="0"/>
+              </a:spcAft>
+            </a:pPr>
+            <a:r>
+              <a:rPr sz="1400" b="0">
+                <a:solidFill>
+                  <a:srgbClr val="5E6B7C"/>
+                </a:solidFill>
+                <a:latin typeface="Calibri"/>
+              </a:rPr>
+              <a:t>word is based on the frequency of tool and skill keywords</a:t>
+            </a:r>
+          </a:p>
+          <a:p>
+            <a:pPr algn="l">
+              <a:spcBef>
+                <a:spcPts val="0"/>
+              </a:spcBef>
+              <a:spcAft>
+                <a:spcPts val="0"/>
+              </a:spcAft>
+            </a:pPr>
+            <a:r>
+              <a:rPr sz="1400" b="0">
+                <a:solidFill>
+                  <a:srgbClr val="5E6B7C"/>
+                </a:solidFill>
+                <a:latin typeface="Calibri"/>
+              </a:rPr>
+              <a:t>extracted from online job postings.</a:t>
+            </a:r>
+          </a:p>
+        </p:txBody>
+      </p:sp>
+      <p:sp>
+        <p:nvSpPr>
+          <p:cNvPr id="14" name="TextBox 13"/>
           <p:cNvSpPr txBox="1"/>
           <p:nvPr/>
         </p:nvSpPr>
         <p:spPr>
           <a:xfrm>
-            <a:off x="946404" y="3959352"/>
-            <a:ext cx="4847691" cy="294386"/>
+            <a:off x="658368" y="6400800"/>
+            <a:ext cx="10874959" cy="274320"/>
           </a:xfrm>
           <a:prstGeom prst="rect">
             <a:avLst/>
@@ -11984,358 +11892,12 @@
               </a:spcAft>
             </a:pPr>
             <a:r>
-              <a:rPr sz="1900" b="1">
-                <a:solidFill>
-                  <a:srgbClr val="1B2430"/>
-                </a:solidFill>
-                <a:latin typeface="Calibri"/>
-              </a:rPr>
-              <a:t>FR3 · Remember what you searched</a:t>
-            </a:r>
-          </a:p>
-        </p:txBody>
-      </p:sp>
-      <p:sp>
-        <p:nvSpPr>
-          <p:cNvPr id="18" name="TextBox 17"/>
-          <p:cNvSpPr txBox="1"/>
-          <p:nvPr/>
-        </p:nvSpPr>
-        <p:spPr>
-          <a:xfrm>
-            <a:off x="946404" y="4355338"/>
-            <a:ext cx="4847691" cy="433831"/>
-          </a:xfrm>
-          <a:prstGeom prst="rect">
-            <a:avLst/>
-          </a:prstGeom>
-          <a:noFill/>
-        </p:spPr>
-        <p:txBody>
-          <a:bodyPr wrap="square" lIns="0" rIns="0" tIns="0" bIns="0" anchor="t">
-            <a:spAutoFit/>
-          </a:bodyPr>
-          <a:lstStyle/>
-          <a:p>
-            <a:pPr algn="l">
-              <a:spcBef>
-                <a:spcPts val="0"/>
-              </a:spcBef>
-              <a:spcAft>
-                <a:spcPts val="0"/>
-              </a:spcAft>
-            </a:pPr>
-            <a:r>
-              <a:rPr sz="1400" b="0">
+              <a:rPr sz="1100" b="0">
                 <a:solidFill>
                   <a:srgbClr val="5E6B7C"/>
                 </a:solidFill>
                 <a:latin typeface="Calibri"/>
               </a:rPr>
-              <a:t>Every cloud a signed-in user generates is saved to their account</a:t>
-            </a:r>
-          </a:p>
-          <a:p>
-            <a:pPr algn="l">
-              <a:spcBef>
-                <a:spcPts val="0"/>
-              </a:spcBef>
-              <a:spcAft>
-                <a:spcPts val="0"/>
-              </a:spcAft>
-            </a:pPr>
-            <a:r>
-              <a:rPr sz="1400" b="0">
-                <a:solidFill>
-                  <a:srgbClr val="5E6B7C"/>
-                </a:solidFill>
-                <a:latin typeface="Calibri"/>
-              </a:rPr>
-              <a:t>and can be re-run from their profile in one click.</a:t>
-            </a:r>
-          </a:p>
-        </p:txBody>
-      </p:sp>
-      <p:sp>
-        <p:nvSpPr>
-          <p:cNvPr id="19" name="Rounded Rectangle 18"/>
-          <p:cNvSpPr/>
-          <p:nvPr/>
-        </p:nvSpPr>
-        <p:spPr>
-          <a:xfrm>
-            <a:off x="6233007" y="3794252"/>
-            <a:ext cx="5300319" cy="1185418"/>
-          </a:xfrm>
-          <a:prstGeom prst="roundRect">
-            <a:avLst>
-              <a:gd name="adj" fmla="val 5500"/>
-            </a:avLst>
-          </a:prstGeom>
-          <a:solidFill>
-            <a:srgbClr val="FFFFFF"/>
-          </a:solidFill>
-          <a:ln w="15875">
-            <a:solidFill>
-              <a:srgbClr val="C9D2DE"/>
-            </a:solidFill>
-          </a:ln>
-          <a:effectLst/>
-        </p:spPr>
-        <p:txBody>
-          <a:bodyPr rtlCol="0" anchor="ctr" wrap="square" lIns="0" rIns="0" tIns="0" bIns="0"/>
-          <a:lstStyle/>
-          <a:p>
-            <a:pPr algn="ctr"/>
-          </a:p>
-        </p:txBody>
-      </p:sp>
-      <p:sp>
-        <p:nvSpPr>
-          <p:cNvPr id="20" name="Rectangle 19"/>
-          <p:cNvSpPr/>
-          <p:nvPr/>
-        </p:nvSpPr>
-        <p:spPr>
-          <a:xfrm>
-            <a:off x="6233007" y="3794252"/>
-            <a:ext cx="50292" cy="1185418"/>
-          </a:xfrm>
-          <a:prstGeom prst="rect">
-            <a:avLst/>
-          </a:prstGeom>
-          <a:solidFill>
-            <a:srgbClr val="1F7A6B"/>
-          </a:solidFill>
-          <a:ln>
-            <a:noFill/>
-          </a:ln>
-          <a:effectLst/>
-        </p:spPr>
-        <p:txBody>
-          <a:bodyPr rtlCol="0" anchor="ctr" wrap="square" lIns="0" rIns="0" tIns="0" bIns="0"/>
-          <a:lstStyle/>
-          <a:p>
-            <a:pPr algn="ctr"/>
-          </a:p>
-        </p:txBody>
-      </p:sp>
-      <p:sp>
-        <p:nvSpPr>
-          <p:cNvPr id="21" name="TextBox 20"/>
-          <p:cNvSpPr txBox="1"/>
-          <p:nvPr/>
-        </p:nvSpPr>
-        <p:spPr>
-          <a:xfrm>
-            <a:off x="6521043" y="3959352"/>
-            <a:ext cx="4847691" cy="294386"/>
-          </a:xfrm>
-          <a:prstGeom prst="rect">
-            <a:avLst/>
-          </a:prstGeom>
-          <a:noFill/>
-        </p:spPr>
-        <p:txBody>
-          <a:bodyPr wrap="square" lIns="0" rIns="0" tIns="0" bIns="0" anchor="t">
-            <a:spAutoFit/>
-          </a:bodyPr>
-          <a:lstStyle/>
-          <a:p>
-            <a:pPr algn="l">
-              <a:spcBef>
-                <a:spcPts val="0"/>
-              </a:spcBef>
-              <a:spcAft>
-                <a:spcPts val="0"/>
-              </a:spcAft>
-            </a:pPr>
-            <a:r>
-              <a:rPr sz="1900" b="1">
-                <a:solidFill>
-                  <a:srgbClr val="1B2430"/>
-                </a:solidFill>
-                <a:latin typeface="Calibri"/>
-              </a:rPr>
-              <a:t>FR4 · Fail honestly</a:t>
-            </a:r>
-          </a:p>
-        </p:txBody>
-      </p:sp>
-      <p:sp>
-        <p:nvSpPr>
-          <p:cNvPr id="22" name="TextBox 21"/>
-          <p:cNvSpPr txBox="1"/>
-          <p:nvPr/>
-        </p:nvSpPr>
-        <p:spPr>
-          <a:xfrm>
-            <a:off x="6521043" y="4355338"/>
-            <a:ext cx="4847691" cy="433831"/>
-          </a:xfrm>
-          <a:prstGeom prst="rect">
-            <a:avLst/>
-          </a:prstGeom>
-          <a:noFill/>
-        </p:spPr>
-        <p:txBody>
-          <a:bodyPr wrap="square" lIns="0" rIns="0" tIns="0" bIns="0" anchor="t">
-            <a:spAutoFit/>
-          </a:bodyPr>
-          <a:lstStyle/>
-          <a:p>
-            <a:pPr algn="l">
-              <a:spcBef>
-                <a:spcPts val="0"/>
-              </a:spcBef>
-              <a:spcAft>
-                <a:spcPts val="0"/>
-              </a:spcAft>
-            </a:pPr>
-            <a:r>
-              <a:rPr sz="1400" b="0">
-                <a:solidFill>
-                  <a:srgbClr val="5E6B7C"/>
-                </a:solidFill>
-                <a:latin typeface="Calibri"/>
-              </a:rPr>
-              <a:t>If the filters match too little posting data to build a cloud, the app</a:t>
-            </a:r>
-          </a:p>
-          <a:p>
-            <a:pPr algn="l">
-              <a:spcBef>
-                <a:spcPts val="0"/>
-              </a:spcBef>
-              <a:spcAft>
-                <a:spcPts val="0"/>
-              </a:spcAft>
-            </a:pPr>
-            <a:r>
-              <a:rPr sz="1400" b="0">
-                <a:solidFill>
-                  <a:srgbClr val="5E6B7C"/>
-                </a:solidFill>
-                <a:latin typeface="Calibri"/>
-              </a:rPr>
-              <a:t>says so. It never draws an empty or misleading picture.</a:t>
-            </a:r>
-          </a:p>
-        </p:txBody>
-      </p:sp>
-      <p:sp>
-        <p:nvSpPr>
-          <p:cNvPr id="23" name="Rounded Rectangle 22"/>
-          <p:cNvSpPr/>
-          <p:nvPr/>
-        </p:nvSpPr>
-        <p:spPr>
-          <a:xfrm>
-            <a:off x="658368" y="5217414"/>
-            <a:ext cx="10874959" cy="593598"/>
-          </a:xfrm>
-          <a:prstGeom prst="roundRect">
-            <a:avLst>
-              <a:gd name="adj" fmla="val 14000"/>
-            </a:avLst>
-          </a:prstGeom>
-          <a:solidFill>
-            <a:srgbClr val="FFFFFF"/>
-          </a:solidFill>
-          <a:ln w="15875">
-            <a:solidFill>
-              <a:srgbClr val="C9D2DE"/>
-            </a:solidFill>
-          </a:ln>
-          <a:effectLst/>
-        </p:spPr>
-        <p:txBody>
-          <a:bodyPr rtlCol="0" anchor="ctr" wrap="square" lIns="0" rIns="0" tIns="0" bIns="0"/>
-          <a:lstStyle/>
-          <a:p>
-            <a:pPr algn="ctr"/>
-          </a:p>
-        </p:txBody>
-      </p:sp>
-      <p:sp>
-        <p:nvSpPr>
-          <p:cNvPr id="24" name="TextBox 23"/>
-          <p:cNvSpPr txBox="1"/>
-          <p:nvPr/>
-        </p:nvSpPr>
-        <p:spPr>
-          <a:xfrm>
-            <a:off x="969264" y="5382514"/>
-            <a:ext cx="10253167" cy="263398"/>
-          </a:xfrm>
-          <a:prstGeom prst="rect">
-            <a:avLst/>
-          </a:prstGeom>
-          <a:noFill/>
-        </p:spPr>
-        <p:txBody>
-          <a:bodyPr wrap="square" lIns="0" rIns="0" tIns="0" bIns="0" anchor="t">
-            <a:spAutoFit/>
-          </a:bodyPr>
-          <a:lstStyle/>
-          <a:p>
-            <a:pPr algn="l">
-              <a:spcBef>
-                <a:spcPts val="0"/>
-              </a:spcBef>
-              <a:spcAft>
-                <a:spcPts val="0"/>
-              </a:spcAft>
-            </a:pPr>
-            <a:r>
-              <a:rPr sz="1700" b="1">
-                <a:solidFill>
-                  <a:srgbClr val="1B2430"/>
-                </a:solidFill>
-                <a:latin typeface="Calibri"/>
-              </a:rPr>
-              <a:t>The word cloud is the front door — everything else in the app is reached through it.</a:t>
-            </a:r>
-          </a:p>
-        </p:txBody>
-      </p:sp>
-      <p:sp>
-        <p:nvSpPr>
-          <p:cNvPr id="25" name="TextBox 24"/>
-          <p:cNvSpPr txBox="1"/>
-          <p:nvPr/>
-        </p:nvSpPr>
-        <p:spPr>
-          <a:xfrm>
-            <a:off x="658368" y="6400800"/>
-            <a:ext cx="10874959" cy="274320"/>
-          </a:xfrm>
-          <a:prstGeom prst="rect">
-            <a:avLst/>
-          </a:prstGeom>
-          <a:noFill/>
-        </p:spPr>
-        <p:txBody>
-          <a:bodyPr wrap="square" lIns="0" rIns="0" tIns="0" bIns="0" anchor="t">
-            <a:spAutoFit/>
-          </a:bodyPr>
-          <a:lstStyle/>
-          <a:p>
-            <a:pPr algn="l">
-              <a:spcBef>
-                <a:spcPts val="0"/>
-              </a:spcBef>
-              <a:spcAft>
-                <a:spcPts val="0"/>
-              </a:spcAft>
-            </a:pPr>
-            <a:r>
-              <a:rPr sz="1100" b="0">
-                <a:solidFill>
-                  <a:srgbClr val="5E6B7C"/>
-                </a:solidFill>
-                <a:latin typeface="Calibri"/>
-              </a:rPr>
               <a:t>JobHopper   ·   The Laughing Bots</a:t>
             </a:r>
           </a:p>
@@ -12343,7 +11905,7 @@
       </p:sp>
       <p:sp>
         <p:nvSpPr>
-          <p:cNvPr id="26" name="TextBox 25"/>
+          <p:cNvPr id="15" name="TextBox 14"/>
           <p:cNvSpPr txBox="1"/>
           <p:nvPr/>
         </p:nvSpPr>
@@ -12510,7 +12072,7 @@
                 </a:solidFill>
                 <a:latin typeface="Calibri"/>
               </a:rPr>
-              <a:t>From a picture to practice</a:t>
+              <a:t>Scraping the postings, and the Q&amp;A game</a:t>
             </a:r>
           </a:p>
         </p:txBody>
@@ -12554,7 +12116,7 @@
         <p:spPr>
           <a:xfrm>
             <a:off x="658368" y="1590548"/>
-            <a:ext cx="5300319" cy="1619250"/>
+            <a:ext cx="10874959" cy="1417828"/>
           </a:xfrm>
           <a:prstGeom prst="roundRect">
             <a:avLst>
@@ -12588,7 +12150,7 @@
         <p:spPr>
           <a:xfrm>
             <a:off x="658368" y="1590548"/>
-            <a:ext cx="50292" cy="1619250"/>
+            <a:ext cx="50292" cy="1417828"/>
           </a:xfrm>
           <a:prstGeom prst="rect">
             <a:avLst/>
@@ -12618,7 +12180,7 @@
         <p:spPr>
           <a:xfrm>
             <a:off x="946404" y="1755648"/>
-            <a:ext cx="4847691" cy="294386"/>
+            <a:ext cx="10422331" cy="309880"/>
           </a:xfrm>
           <a:prstGeom prst="rect">
             <a:avLst/>
@@ -12640,13 +12202,13 @@
               </a:spcAft>
             </a:pPr>
             <a:r>
-              <a:rPr sz="1900" b="1">
+              <a:rPr sz="2000" b="1">
                 <a:solidFill>
                   <a:srgbClr val="1B2430"/>
                 </a:solidFill>
                 <a:latin typeface="Calibri"/>
               </a:rPr>
-              <a:t>FR5 · Play a quiz on any skill</a:t>
+              <a:t>Job scraping</a:t>
             </a:r>
           </a:p>
         </p:txBody>
@@ -12659,8 +12221,8 @@
         </p:nvSpPr>
         <p:spPr>
           <a:xfrm>
-            <a:off x="946404" y="2151634"/>
-            <a:ext cx="4847691" cy="650748"/>
+            <a:off x="946404" y="2167128"/>
+            <a:ext cx="10422331" cy="650748"/>
           </a:xfrm>
           <a:prstGeom prst="rect">
             <a:avLst/>
@@ -12688,13 +12250,13 @@
                 </a:solidFill>
                 <a:latin typeface="Calibri"/>
               </a:rPr>
-              <a:t>Any skill backed by a question bank is clickable. Ten</a:t>
-            </a:r>
-          </a:p>
-          <a:p>
-            <a:pPr algn="l">
-              <a:spcBef>
-                <a:spcPts val="0"/>
+              <a:t>The system shall calculate the frequency of tool and skill keywords extracted from online job postings.</a:t>
+            </a:r>
+          </a:p>
+          <a:p>
+            <a:pPr algn="l">
+              <a:spcBef>
+                <a:spcPts val="770"/>
               </a:spcBef>
               <a:spcAft>
                 <a:spcPts val="0"/>
@@ -12707,26 +12269,7 @@
                 </a:solidFill>
                 <a:latin typeface="Calibri"/>
               </a:rPr>
-              <a:t>multiple-choice questions at easy, medium or hard, each</a:t>
-            </a:r>
-          </a:p>
-          <a:p>
-            <a:pPr algn="l">
-              <a:spcBef>
-                <a:spcPts val="0"/>
-              </a:spcBef>
-              <a:spcAft>
-                <a:spcPts val="0"/>
-              </a:spcAft>
-            </a:pPr>
-            <a:r>
-              <a:rPr sz="1400" b="0">
-                <a:solidFill>
-                  <a:srgbClr val="5E6B7C"/>
-                </a:solidFill>
-                <a:latin typeface="Calibri"/>
-              </a:rPr>
-              <a:t>difficulty on its own timer — 3:00, 2:00 or 1:30.</a:t>
+              <a:t>The system shall display an error in the event that there is not enough job information for the word cloud.</a:t>
             </a:r>
           </a:p>
         </p:txBody>
@@ -12739,8 +12282,8 @@
         </p:nvSpPr>
         <p:spPr>
           <a:xfrm>
-            <a:off x="6233007" y="1590548"/>
-            <a:ext cx="5300319" cy="1619250"/>
+            <a:off x="658368" y="3227832"/>
+            <a:ext cx="10874959" cy="2719324"/>
           </a:xfrm>
           <a:prstGeom prst="roundRect">
             <a:avLst>
@@ -12773,8 +12316,8 @@
         </p:nvSpPr>
         <p:spPr>
           <a:xfrm>
-            <a:off x="6233007" y="1590548"/>
-            <a:ext cx="50292" cy="1619250"/>
+            <a:off x="658368" y="3227832"/>
+            <a:ext cx="50292" cy="2719324"/>
           </a:xfrm>
           <a:prstGeom prst="rect">
             <a:avLst/>
@@ -12803,8 +12346,8 @@
         </p:nvSpPr>
         <p:spPr>
           <a:xfrm>
-            <a:off x="6521043" y="1755648"/>
-            <a:ext cx="4847691" cy="294386"/>
+            <a:off x="946404" y="3392932"/>
+            <a:ext cx="10422331" cy="309880"/>
           </a:xfrm>
           <a:prstGeom prst="rect">
             <a:avLst/>
@@ -12826,13 +12369,13 @@
               </a:spcAft>
             </a:pPr>
             <a:r>
-              <a:rPr sz="1900" b="1">
+              <a:rPr sz="2000" b="1">
                 <a:solidFill>
                   <a:srgbClr val="1B2430"/>
                 </a:solidFill>
                 <a:latin typeface="Calibri"/>
               </a:rPr>
-              <a:t>FR6 · Live scoring, honestly done</a:t>
+              <a:t>Q&amp;A game</a:t>
             </a:r>
           </a:p>
         </p:txBody>
@@ -12845,8 +12388,8 @@
         </p:nvSpPr>
         <p:spPr>
           <a:xfrm>
-            <a:off x="6521043" y="2151634"/>
-            <a:ext cx="4847691" cy="867663"/>
+            <a:off x="946404" y="3804412"/>
+            <a:ext cx="10422331" cy="1952244"/>
           </a:xfrm>
           <a:prstGeom prst="rect">
             <a:avLst/>
@@ -12874,13 +12417,13 @@
                 </a:solidFill>
                 <a:latin typeface="Calibri"/>
               </a:rPr>
-              <a:t>Each answer is locked in on the server as it is chosen, and only</a:t>
-            </a:r>
-          </a:p>
-          <a:p>
-            <a:pPr algn="l">
-              <a:spcBef>
-                <a:spcPts val="0"/>
+              <a:t>The system shall allow the user to click on any word in the word cloud.</a:t>
+            </a:r>
+          </a:p>
+          <a:p>
+            <a:pPr algn="l">
+              <a:spcBef>
+                <a:spcPts val="770"/>
               </a:spcBef>
               <a:spcAft>
                 <a:spcPts val="0"/>
@@ -12893,13 +12436,13 @@
                 </a:solidFill>
                 <a:latin typeface="Calibri"/>
               </a:rPr>
-              <a:t>then is the player told whether it was right. Knowing the answer</a:t>
-            </a:r>
-          </a:p>
-          <a:p>
-            <a:pPr algn="l">
-              <a:spcBef>
-                <a:spcPts val="0"/>
+              <a:t>The system shall redirect the user to the respective Q&amp;A game dashboard after the user clicks on a word from the word cloud.</a:t>
+            </a:r>
+          </a:p>
+          <a:p>
+            <a:pPr algn="l">
+              <a:spcBef>
+                <a:spcPts val="770"/>
               </a:spcBef>
               <a:spcAft>
                 <a:spcPts val="0"/>
@@ -12912,13 +12455,13 @@
                 </a:solidFill>
                 <a:latin typeface="Calibri"/>
               </a:rPr>
-              <a:t>afterwards cannot change it, so the running score and the final</a:t>
-            </a:r>
-          </a:p>
-          <a:p>
-            <a:pPr algn="l">
-              <a:spcBef>
-                <a:spcPts val="0"/>
+              <a:t>The system shall select Q&amp;A game questions that are related to the skill or tool keyword and the difficulty that the user selected.</a:t>
+            </a:r>
+          </a:p>
+          <a:p>
+            <a:pPr algn="l">
+              <a:spcBef>
+                <a:spcPts val="770"/>
               </a:spcBef>
               <a:spcAft>
                 <a:spcPts val="0"/>
@@ -12931,85 +12474,40 @@
                 </a:solidFill>
                 <a:latin typeface="Calibri"/>
               </a:rPr>
-              <a:t>score always agree.</a:t>
-            </a:r>
-          </a:p>
-        </p:txBody>
-      </p:sp>
-      <p:sp>
-        <p:nvSpPr>
-          <p:cNvPr id="14" name="Rounded Rectangle 13"/>
-          <p:cNvSpPr/>
-          <p:nvPr/>
-        </p:nvSpPr>
-        <p:spPr>
-          <a:xfrm>
-            <a:off x="658368" y="3429254"/>
-            <a:ext cx="5300319" cy="1402334"/>
-          </a:xfrm>
-          <a:prstGeom prst="roundRect">
-            <a:avLst>
-              <a:gd name="adj" fmla="val 5500"/>
-            </a:avLst>
-          </a:prstGeom>
-          <a:solidFill>
-            <a:srgbClr val="FFFFFF"/>
-          </a:solidFill>
-          <a:ln w="15875">
-            <a:solidFill>
-              <a:srgbClr val="C9D2DE"/>
-            </a:solidFill>
-          </a:ln>
-          <a:effectLst/>
-        </p:spPr>
-        <p:txBody>
-          <a:bodyPr rtlCol="0" anchor="ctr" wrap="square" lIns="0" rIns="0" tIns="0" bIns="0"/>
-          <a:lstStyle/>
-          <a:p>
-            <a:pPr algn="ctr"/>
-          </a:p>
-        </p:txBody>
-      </p:sp>
-      <p:sp>
-        <p:nvSpPr>
-          <p:cNvPr id="15" name="Rectangle 14"/>
-          <p:cNvSpPr/>
-          <p:nvPr/>
-        </p:nvSpPr>
-        <p:spPr>
-          <a:xfrm>
-            <a:off x="658368" y="3429254"/>
-            <a:ext cx="50292" cy="1402334"/>
-          </a:xfrm>
-          <a:prstGeom prst="rect">
-            <a:avLst/>
-          </a:prstGeom>
-          <a:solidFill>
-            <a:srgbClr val="3F5C99"/>
-          </a:solidFill>
-          <a:ln>
-            <a:noFill/>
-          </a:ln>
-          <a:effectLst/>
-        </p:spPr>
-        <p:txBody>
-          <a:bodyPr rtlCol="0" anchor="ctr" wrap="square" lIns="0" rIns="0" tIns="0" bIns="0"/>
-          <a:lstStyle/>
-          <a:p>
-            <a:pPr algn="ctr"/>
-          </a:p>
-        </p:txBody>
-      </p:sp>
-      <p:sp>
-        <p:nvSpPr>
-          <p:cNvPr id="16" name="TextBox 15"/>
+              <a:t>The system shall keep a timer for the user's quiz completion based on the selected difficulty.</a:t>
+            </a:r>
+          </a:p>
+          <a:p>
+            <a:pPr algn="l">
+              <a:spcBef>
+                <a:spcPts val="770"/>
+              </a:spcBef>
+              <a:spcAft>
+                <a:spcPts val="0"/>
+              </a:spcAft>
+            </a:pPr>
+            <a:r>
+              <a:rPr sz="1400" b="0">
+                <a:solidFill>
+                  <a:srgbClr val="5E6B7C"/>
+                </a:solidFill>
+                <a:latin typeface="Calibri"/>
+              </a:rPr>
+              <a:t>The system shall display the score to the user.</a:t>
+            </a:r>
+          </a:p>
+        </p:txBody>
+      </p:sp>
+      <p:sp>
+        <p:nvSpPr>
+          <p:cNvPr id="14" name="TextBox 13"/>
           <p:cNvSpPr txBox="1"/>
           <p:nvPr/>
         </p:nvSpPr>
         <p:spPr>
           <a:xfrm>
-            <a:off x="946404" y="3594354"/>
-            <a:ext cx="4847691" cy="294386"/>
+            <a:off x="658368" y="6400800"/>
+            <a:ext cx="10874959" cy="274320"/>
           </a:xfrm>
           <a:prstGeom prst="rect">
             <a:avLst/>
@@ -13031,425 +12529,12 @@
               </a:spcAft>
             </a:pPr>
             <a:r>
-              <a:rPr sz="1900" b="1">
-                <a:solidFill>
-                  <a:srgbClr val="1B2430"/>
-                </a:solidFill>
-                <a:latin typeface="Calibri"/>
-              </a:rPr>
-              <a:t>FR7 · Remember how you did</a:t>
-            </a:r>
-          </a:p>
-        </p:txBody>
-      </p:sp>
-      <p:sp>
-        <p:nvSpPr>
-          <p:cNvPr id="17" name="TextBox 16"/>
-          <p:cNvSpPr txBox="1"/>
-          <p:nvPr/>
-        </p:nvSpPr>
-        <p:spPr>
-          <a:xfrm>
-            <a:off x="946404" y="3990340"/>
-            <a:ext cx="4847691" cy="433831"/>
-          </a:xfrm>
-          <a:prstGeom prst="rect">
-            <a:avLst/>
-          </a:prstGeom>
-          <a:noFill/>
-        </p:spPr>
-        <p:txBody>
-          <a:bodyPr wrap="square" lIns="0" rIns="0" tIns="0" bIns="0" anchor="t">
-            <a:spAutoFit/>
-          </a:bodyPr>
-          <a:lstStyle/>
-          <a:p>
-            <a:pPr algn="l">
-              <a:spcBef>
-                <a:spcPts val="0"/>
-              </a:spcBef>
-              <a:spcAft>
-                <a:spcPts val="0"/>
-              </a:spcAft>
-            </a:pPr>
-            <a:r>
-              <a:rPr sz="1400" b="0">
+              <a:rPr sz="1100" b="0">
                 <a:solidFill>
                   <a:srgbClr val="5E6B7C"/>
                 </a:solidFill>
                 <a:latin typeface="Calibri"/>
               </a:rPr>
-              <a:t>Completed quizzes are saved to the account with the skill, the</a:t>
-            </a:r>
-          </a:p>
-          <a:p>
-            <a:pPr algn="l">
-              <a:spcBef>
-                <a:spcPts val="0"/>
-              </a:spcBef>
-              <a:spcAft>
-                <a:spcPts val="0"/>
-              </a:spcAft>
-            </a:pPr>
-            <a:r>
-              <a:rPr sz="1400" b="0">
-                <a:solidFill>
-                  <a:srgbClr val="5E6B7C"/>
-                </a:solidFill>
-                <a:latin typeface="Calibri"/>
-              </a:rPr>
-              <a:t>difficulty and the score, and shown back on the profile page.</a:t>
-            </a:r>
-          </a:p>
-        </p:txBody>
-      </p:sp>
-      <p:sp>
-        <p:nvSpPr>
-          <p:cNvPr id="18" name="Rounded Rectangle 17"/>
-          <p:cNvSpPr/>
-          <p:nvPr/>
-        </p:nvSpPr>
-        <p:spPr>
-          <a:xfrm>
-            <a:off x="6233007" y="3429254"/>
-            <a:ext cx="5300319" cy="1402334"/>
-          </a:xfrm>
-          <a:prstGeom prst="roundRect">
-            <a:avLst>
-              <a:gd name="adj" fmla="val 5500"/>
-            </a:avLst>
-          </a:prstGeom>
-          <a:solidFill>
-            <a:srgbClr val="FFFFFF"/>
-          </a:solidFill>
-          <a:ln w="15875">
-            <a:solidFill>
-              <a:srgbClr val="C9D2DE"/>
-            </a:solidFill>
-          </a:ln>
-          <a:effectLst/>
-        </p:spPr>
-        <p:txBody>
-          <a:bodyPr rtlCol="0" anchor="ctr" wrap="square" lIns="0" rIns="0" tIns="0" bIns="0"/>
-          <a:lstStyle/>
-          <a:p>
-            <a:pPr algn="ctr"/>
-          </a:p>
-        </p:txBody>
-      </p:sp>
-      <p:sp>
-        <p:nvSpPr>
-          <p:cNvPr id="19" name="Rectangle 18"/>
-          <p:cNvSpPr/>
-          <p:nvPr/>
-        </p:nvSpPr>
-        <p:spPr>
-          <a:xfrm>
-            <a:off x="6233007" y="3429254"/>
-            <a:ext cx="50292" cy="1402334"/>
-          </a:xfrm>
-          <a:prstGeom prst="rect">
-            <a:avLst/>
-          </a:prstGeom>
-          <a:solidFill>
-            <a:srgbClr val="5B6472"/>
-          </a:solidFill>
-          <a:ln>
-            <a:noFill/>
-          </a:ln>
-          <a:effectLst/>
-        </p:spPr>
-        <p:txBody>
-          <a:bodyPr rtlCol="0" anchor="ctr" wrap="square" lIns="0" rIns="0" tIns="0" bIns="0"/>
-          <a:lstStyle/>
-          <a:p>
-            <a:pPr algn="ctr"/>
-          </a:p>
-        </p:txBody>
-      </p:sp>
-      <p:sp>
-        <p:nvSpPr>
-          <p:cNvPr id="20" name="TextBox 19"/>
-          <p:cNvSpPr txBox="1"/>
-          <p:nvPr/>
-        </p:nvSpPr>
-        <p:spPr>
-          <a:xfrm>
-            <a:off x="6521043" y="3594354"/>
-            <a:ext cx="4847691" cy="294386"/>
-          </a:xfrm>
-          <a:prstGeom prst="rect">
-            <a:avLst/>
-          </a:prstGeom>
-          <a:noFill/>
-        </p:spPr>
-        <p:txBody>
-          <a:bodyPr wrap="square" lIns="0" rIns="0" tIns="0" bIns="0" anchor="t">
-            <a:spAutoFit/>
-          </a:bodyPr>
-          <a:lstStyle/>
-          <a:p>
-            <a:pPr algn="l">
-              <a:spcBef>
-                <a:spcPts val="0"/>
-              </a:spcBef>
-              <a:spcAft>
-                <a:spcPts val="0"/>
-              </a:spcAft>
-            </a:pPr>
-            <a:r>
-              <a:rPr sz="1900" b="1">
-                <a:solidFill>
-                  <a:srgbClr val="1B2430"/>
-                </a:solidFill>
-                <a:latin typeface="Calibri"/>
-              </a:rPr>
-              <a:t>FR8 · Personal prep roadmap</a:t>
-            </a:r>
-          </a:p>
-        </p:txBody>
-      </p:sp>
-      <p:sp>
-        <p:nvSpPr>
-          <p:cNvPr id="21" name="TextBox 20"/>
-          <p:cNvSpPr txBox="1"/>
-          <p:nvPr/>
-        </p:nvSpPr>
-        <p:spPr>
-          <a:xfrm>
-            <a:off x="6521043" y="3990340"/>
-            <a:ext cx="4847691" cy="650748"/>
-          </a:xfrm>
-          <a:prstGeom prst="rect">
-            <a:avLst/>
-          </a:prstGeom>
-          <a:noFill/>
-        </p:spPr>
-        <p:txBody>
-          <a:bodyPr wrap="square" lIns="0" rIns="0" tIns="0" bIns="0" anchor="t">
-            <a:spAutoFit/>
-          </a:bodyPr>
-          <a:lstStyle/>
-          <a:p>
-            <a:pPr algn="l">
-              <a:spcBef>
-                <a:spcPts val="0"/>
-              </a:spcBef>
-              <a:spcAft>
-                <a:spcPts val="0"/>
-              </a:spcAft>
-            </a:pPr>
-            <a:r>
-              <a:rPr sz="1400" b="0">
-                <a:solidFill>
-                  <a:srgbClr val="5E6B7C"/>
-                </a:solidFill>
-                <a:latin typeface="Calibri"/>
-              </a:rPr>
-              <a:t>An ordered list of skills to learn for a target role, each step</a:t>
-            </a:r>
-          </a:p>
-          <a:p>
-            <a:pPr algn="l">
-              <a:spcBef>
-                <a:spcPts val="0"/>
-              </a:spcBef>
-              <a:spcAft>
-                <a:spcPts val="0"/>
-              </a:spcAft>
-            </a:pPr>
-            <a:r>
-              <a:rPr sz="1400" b="0">
-                <a:solidFill>
-                  <a:srgbClr val="5E6B7C"/>
-                </a:solidFill>
-                <a:latin typeface="Calibri"/>
-              </a:rPr>
-              <a:t>markable as you go. The API is built and covered by tests — it</a:t>
-            </a:r>
-          </a:p>
-          <a:p>
-            <a:pPr algn="l">
-              <a:spcBef>
-                <a:spcPts val="0"/>
-              </a:spcBef>
-              <a:spcAft>
-                <a:spcPts val="0"/>
-              </a:spcAft>
-            </a:pPr>
-            <a:r>
-              <a:rPr sz="1400" b="0">
-                <a:solidFill>
-                  <a:srgbClr val="5E6B7C"/>
-                </a:solidFill>
-                <a:latin typeface="Calibri"/>
-              </a:rPr>
-              <a:t>never got a screen. More on that at the end.</a:t>
-            </a:r>
-          </a:p>
-        </p:txBody>
-      </p:sp>
-      <p:sp>
-        <p:nvSpPr>
-          <p:cNvPr id="22" name="Rounded Rectangle 21"/>
-          <p:cNvSpPr/>
-          <p:nvPr/>
-        </p:nvSpPr>
-        <p:spPr>
-          <a:xfrm>
-            <a:off x="10454335" y="3568954"/>
-            <a:ext cx="868680" cy="228600"/>
-          </a:xfrm>
-          <a:prstGeom prst="roundRect">
-            <a:avLst>
-              <a:gd name="adj" fmla="val 40000"/>
-            </a:avLst>
-          </a:prstGeom>
-          <a:solidFill>
-            <a:srgbClr val="B0742C"/>
-          </a:solidFill>
-          <a:ln>
-            <a:noFill/>
-          </a:ln>
-          <a:effectLst/>
-        </p:spPr>
-        <p:txBody>
-          <a:bodyPr rtlCol="0" anchor="ctr" wrap="square" lIns="0" rIns="0" tIns="0" bIns="0"/>
-          <a:lstStyle/>
-          <a:p>
-            <a:pPr algn="ctr">
-              <a:spcBef>
-                <a:spcPts val="0"/>
-              </a:spcBef>
-              <a:spcAft>
-                <a:spcPts val="0"/>
-              </a:spcAft>
-            </a:pPr>
-            <a:r>
-              <a:rPr sz="950" b="1">
-                <a:solidFill>
-                  <a:srgbClr val="FFFFFF"/>
-                </a:solidFill>
-                <a:latin typeface="Calibri"/>
-              </a:rPr>
-              <a:t>API ONLY</a:t>
-            </a:r>
-          </a:p>
-        </p:txBody>
-      </p:sp>
-      <p:sp>
-        <p:nvSpPr>
-          <p:cNvPr id="23" name="Rounded Rectangle 22"/>
-          <p:cNvSpPr/>
-          <p:nvPr/>
-        </p:nvSpPr>
-        <p:spPr>
-          <a:xfrm>
-            <a:off x="658368" y="5069332"/>
-            <a:ext cx="10874959" cy="593598"/>
-          </a:xfrm>
-          <a:prstGeom prst="roundRect">
-            <a:avLst>
-              <a:gd name="adj" fmla="val 14000"/>
-            </a:avLst>
-          </a:prstGeom>
-          <a:solidFill>
-            <a:srgbClr val="FFFFFF"/>
-          </a:solidFill>
-          <a:ln w="15875">
-            <a:solidFill>
-              <a:srgbClr val="C9D2DE"/>
-            </a:solidFill>
-          </a:ln>
-          <a:effectLst/>
-        </p:spPr>
-        <p:txBody>
-          <a:bodyPr rtlCol="0" anchor="ctr" wrap="square" lIns="0" rIns="0" tIns="0" bIns="0"/>
-          <a:lstStyle/>
-          <a:p>
-            <a:pPr algn="ctr"/>
-          </a:p>
-        </p:txBody>
-      </p:sp>
-      <p:sp>
-        <p:nvSpPr>
-          <p:cNvPr id="24" name="TextBox 23"/>
-          <p:cNvSpPr txBox="1"/>
-          <p:nvPr/>
-        </p:nvSpPr>
-        <p:spPr>
-          <a:xfrm>
-            <a:off x="969264" y="5234432"/>
-            <a:ext cx="10253167" cy="263398"/>
-          </a:xfrm>
-          <a:prstGeom prst="rect">
-            <a:avLst/>
-          </a:prstGeom>
-          <a:noFill/>
-        </p:spPr>
-        <p:txBody>
-          <a:bodyPr wrap="square" lIns="0" rIns="0" tIns="0" bIns="0" anchor="t">
-            <a:spAutoFit/>
-          </a:bodyPr>
-          <a:lstStyle/>
-          <a:p>
-            <a:pPr algn="l">
-              <a:spcBef>
-                <a:spcPts val="0"/>
-              </a:spcBef>
-              <a:spcAft>
-                <a:spcPts val="0"/>
-              </a:spcAft>
-            </a:pPr>
-            <a:r>
-              <a:rPr sz="1700" b="1">
-                <a:solidFill>
-                  <a:srgbClr val="1B2430"/>
-                </a:solidFill>
-                <a:latin typeface="Calibri"/>
-              </a:rPr>
-              <a:t>Behind it: 1,260 questions — 28 skills × 3 difficulties × 15 questions each.</a:t>
-            </a:r>
-          </a:p>
-        </p:txBody>
-      </p:sp>
-      <p:sp>
-        <p:nvSpPr>
-          <p:cNvPr id="25" name="TextBox 24"/>
-          <p:cNvSpPr txBox="1"/>
-          <p:nvPr/>
-        </p:nvSpPr>
-        <p:spPr>
-          <a:xfrm>
-            <a:off x="658368" y="6400800"/>
-            <a:ext cx="10874959" cy="274320"/>
-          </a:xfrm>
-          <a:prstGeom prst="rect">
-            <a:avLst/>
-          </a:prstGeom>
-          <a:noFill/>
-        </p:spPr>
-        <p:txBody>
-          <a:bodyPr wrap="square" lIns="0" rIns="0" tIns="0" bIns="0" anchor="t">
-            <a:spAutoFit/>
-          </a:bodyPr>
-          <a:lstStyle/>
-          <a:p>
-            <a:pPr algn="l">
-              <a:spcBef>
-                <a:spcPts val="0"/>
-              </a:spcBef>
-              <a:spcAft>
-                <a:spcPts val="0"/>
-              </a:spcAft>
-            </a:pPr>
-            <a:r>
-              <a:rPr sz="1100" b="0">
-                <a:solidFill>
-                  <a:srgbClr val="5E6B7C"/>
-                </a:solidFill>
-                <a:latin typeface="Calibri"/>
-              </a:rPr>
               <a:t>JobHopper   ·   The Laughing Bots</a:t>
             </a:r>
           </a:p>
@@ -13457,7 +12542,7 @@
       </p:sp>
       <p:sp>
         <p:nvSpPr>
-          <p:cNvPr id="26" name="TextBox 25"/>
+          <p:cNvPr id="15" name="TextBox 14"/>
           <p:cNvSpPr txBox="1"/>
           <p:nvPr/>
         </p:nvSpPr>
@@ -13666,7 +12751,7 @@
                 </a:solidFill>
                 <a:latin typeface="Calibri"/>
               </a:rPr>
-              <a:t>Not features — but the app is wrong without them.</a:t>
+              <a:t>Not features - but the app is wrong without them.</a:t>
             </a:r>
           </a:p>
         </p:txBody>
@@ -13710,7 +12795,7 @@
         <p:spPr>
           <a:xfrm>
             <a:off x="658368" y="1955546"/>
-            <a:ext cx="3442106" cy="1797431"/>
+            <a:ext cx="3442106" cy="1588262"/>
           </a:xfrm>
           <a:prstGeom prst="roundRect">
             <a:avLst>
@@ -13744,13 +12829,13 @@
         <p:spPr>
           <a:xfrm>
             <a:off x="658368" y="1955546"/>
-            <a:ext cx="50292" cy="1797431"/>
+            <a:ext cx="50292" cy="1588262"/>
           </a:xfrm>
           <a:prstGeom prst="rect">
             <a:avLst/>
           </a:prstGeom>
           <a:solidFill>
-            <a:srgbClr val="3F5C99"/>
+            <a:srgbClr val="1F7A6B"/>
           </a:solidFill>
           <a:ln>
             <a:noFill/>
@@ -13802,7 +12887,7 @@
                 </a:solidFill>
                 <a:latin typeface="Calibri"/>
               </a:rPr>
-              <a:t>Security</a:t>
+              <a:t>Word cloud speed</a:t>
             </a:r>
           </a:p>
         </p:txBody>
@@ -13816,7 +12901,7 @@
         <p:spPr>
           <a:xfrm>
             <a:off x="946404" y="2516632"/>
-            <a:ext cx="2989478" cy="1045844"/>
+            <a:ext cx="2989478" cy="627507"/>
           </a:xfrm>
           <a:prstGeom prst="rect">
             <a:avLst/>
@@ -13844,7 +12929,7 @@
                 </a:solidFill>
                 <a:latin typeface="Calibri"/>
               </a:rPr>
-              <a:t>Passwords are bcrypt-hashed, never</a:t>
+              <a:t>The system should generate and display</a:t>
             </a:r>
           </a:p>
           <a:p>
@@ -13863,7 +12948,7 @@
                 </a:solidFill>
                 <a:latin typeface="Calibri"/>
               </a:rPr>
-              <a:t>stored or returned. Tokens are signed</a:t>
+              <a:t>the skill word cloud within 10 seconds of</a:t>
             </a:r>
           </a:p>
           <a:p>
@@ -13882,45 +12967,7 @@
                 </a:solidFill>
                 <a:latin typeface="Calibri"/>
               </a:rPr>
-              <a:t>and expire in 24 hours. A failed login</a:t>
-            </a:r>
-          </a:p>
-          <a:p>
-            <a:pPr algn="l">
-              <a:spcBef>
-                <a:spcPts val="0"/>
-              </a:spcBef>
-              <a:spcAft>
-                <a:spcPts val="0"/>
-              </a:spcAft>
-            </a:pPr>
-            <a:r>
-              <a:rPr sz="1350" b="0">
-                <a:solidFill>
-                  <a:srgbClr val="5E6B7C"/>
-                </a:solidFill>
-                <a:latin typeface="Calibri"/>
-              </a:rPr>
-              <a:t>gives one generic message, so it can't</a:t>
-            </a:r>
-          </a:p>
-          <a:p>
-            <a:pPr algn="l">
-              <a:spcBef>
-                <a:spcPts val="0"/>
-              </a:spcBef>
-              <a:spcAft>
-                <a:spcPts val="0"/>
-              </a:spcAft>
-            </a:pPr>
-            <a:r>
-              <a:rPr sz="1350" b="0">
-                <a:solidFill>
-                  <a:srgbClr val="5E6B7C"/>
-                </a:solidFill>
-                <a:latin typeface="Calibri"/>
-              </a:rPr>
-              <a:t>reveal which usernames exist.</a:t>
+              <a:t>the user submitting valid search criteria.</a:t>
             </a:r>
           </a:p>
         </p:txBody>
@@ -13934,7 +12981,7 @@
         <p:spPr>
           <a:xfrm>
             <a:off x="4374794" y="1955546"/>
-            <a:ext cx="3442106" cy="1797431"/>
+            <a:ext cx="3442106" cy="1588262"/>
           </a:xfrm>
           <a:prstGeom prst="roundRect">
             <a:avLst>
@@ -13968,13 +13015,13 @@
         <p:spPr>
           <a:xfrm>
             <a:off x="4374794" y="1955546"/>
-            <a:ext cx="50292" cy="1797431"/>
+            <a:ext cx="50292" cy="1588262"/>
           </a:xfrm>
           <a:prstGeom prst="rect">
             <a:avLst/>
           </a:prstGeom>
           <a:solidFill>
-            <a:srgbClr val="9A4F70"/>
+            <a:srgbClr val="1F7A6B"/>
           </a:solidFill>
           <a:ln>
             <a:noFill/>
@@ -14026,7 +13073,7 @@
                 </a:solidFill>
                 <a:latin typeface="Calibri"/>
               </a:rPr>
-              <a:t>Integrity</a:t>
+              <a:t>Game responsiveness</a:t>
             </a:r>
           </a:p>
         </p:txBody>
@@ -14068,7 +13115,7 @@
                 </a:solidFill>
                 <a:latin typeface="Calibri"/>
               </a:rPr>
-              <a:t>The server decides every score, never</a:t>
+              <a:t>The system should redirect the user to</a:t>
             </a:r>
           </a:p>
           <a:p>
@@ -14087,7 +13134,7 @@
                 </a:solidFill>
                 <a:latin typeface="Calibri"/>
               </a:rPr>
-              <a:t>the browser. A finished quiz can't be</a:t>
+              <a:t>the Q&amp;A game within 10 seconds, and</a:t>
             </a:r>
           </a:p>
           <a:p>
@@ -14106,7 +13153,7 @@
                 </a:solidFill>
                 <a:latin typeface="Calibri"/>
               </a:rPr>
-              <a:t>replayed, and importing the same</a:t>
+              <a:t>calculate their score within 7 seconds of</a:t>
             </a:r>
           </a:p>
           <a:p>
@@ -14125,7 +13172,7 @@
                 </a:solidFill>
                 <a:latin typeface="Calibri"/>
               </a:rPr>
-              <a:t>posting twice can't duplicate it.</a:t>
+              <a:t>finishing.</a:t>
             </a:r>
           </a:p>
         </p:txBody>
@@ -14139,7 +13186,7 @@
         <p:spPr>
           <a:xfrm>
             <a:off x="8091220" y="1955546"/>
-            <a:ext cx="3442106" cy="1797431"/>
+            <a:ext cx="3442106" cy="1588262"/>
           </a:xfrm>
           <a:prstGeom prst="roundRect">
             <a:avLst>
@@ -14173,13 +13220,13 @@
         <p:spPr>
           <a:xfrm>
             <a:off x="8091220" y="1955546"/>
-            <a:ext cx="50292" cy="1797431"/>
+            <a:ext cx="50292" cy="1588262"/>
           </a:xfrm>
           <a:prstGeom prst="rect">
             <a:avLst/>
           </a:prstGeom>
           <a:solidFill>
-            <a:srgbClr val="1F7A6B"/>
+            <a:srgbClr val="3F5C99"/>
           </a:solidFill>
           <a:ln>
             <a:noFill/>
@@ -14231,7 +13278,7 @@
                 </a:solidFill>
                 <a:latin typeface="Calibri"/>
               </a:rPr>
-              <a:t>Performance</a:t>
+              <a:t>Input safety</a:t>
             </a:r>
           </a:p>
         </p:txBody>
@@ -14273,7 +13320,7 @@
                 </a:solidFill>
                 <a:latin typeface="Calibri"/>
               </a:rPr>
-              <a:t>The two hottest queries — building a</a:t>
+              <a:t>The system should validate and sanitize</a:t>
             </a:r>
           </a:p>
           <a:p>
@@ -14292,7 +13339,7 @@
                 </a:solidFill>
                 <a:latin typeface="Calibri"/>
               </a:rPr>
-              <a:t>cloud and pulling a quiz — each run</a:t>
+              <a:t>all user input to prevent injection. Every</a:t>
             </a:r>
           </a:p>
           <a:p>
@@ -14311,7 +13358,7 @@
                 </a:solidFill>
                 <a:latin typeface="Calibri"/>
               </a:rPr>
-              <a:t>against a composite index. Responses</a:t>
+              <a:t>query goes through the ORM,</a:t>
             </a:r>
           </a:p>
           <a:p>
@@ -14330,7 +13377,7 @@
                 </a:solidFill>
                 <a:latin typeface="Calibri"/>
               </a:rPr>
-              <a:t>over 500 bytes are compressed.</a:t>
+              <a:t>parameterised - never built by string.</a:t>
             </a:r>
           </a:p>
         </p:txBody>
@@ -14343,8 +13390,8 @@
         </p:nvSpPr>
         <p:spPr>
           <a:xfrm>
-            <a:off x="658368" y="3972433"/>
-            <a:ext cx="3442106" cy="1797431"/>
+            <a:off x="658368" y="3763264"/>
+            <a:ext cx="3442106" cy="1588262"/>
           </a:xfrm>
           <a:prstGeom prst="roundRect">
             <a:avLst>
@@ -14377,14 +13424,14 @@
         </p:nvSpPr>
         <p:spPr>
           <a:xfrm>
-            <a:off x="658368" y="3972433"/>
-            <a:ext cx="50292" cy="1797431"/>
+            <a:off x="658368" y="3763264"/>
+            <a:ext cx="50292" cy="1588262"/>
           </a:xfrm>
           <a:prstGeom prst="rect">
             <a:avLst/>
           </a:prstGeom>
           <a:solidFill>
-            <a:srgbClr val="5B6472"/>
+            <a:srgbClr val="3F5C99"/>
           </a:solidFill>
           <a:ln>
             <a:noFill/>
@@ -14407,7 +13454,7 @@
         </p:nvSpPr>
         <p:spPr>
           <a:xfrm>
-            <a:off x="946404" y="4137533"/>
+            <a:off x="946404" y="3928364"/>
             <a:ext cx="2989478" cy="294386"/>
           </a:xfrm>
           <a:prstGeom prst="rect">
@@ -14436,7 +13483,7 @@
                 </a:solidFill>
                 <a:latin typeface="Calibri"/>
               </a:rPr>
-              <a:t>Reliability</a:t>
+              <a:t>Credential security</a:t>
             </a:r>
           </a:p>
         </p:txBody>
@@ -14449,7 +13496,7 @@
         </p:nvSpPr>
         <p:spPr>
           <a:xfrm>
-            <a:off x="946404" y="4533519"/>
+            <a:off x="946404" y="4324350"/>
             <a:ext cx="2989478" cy="836676"/>
           </a:xfrm>
           <a:prstGeom prst="rect">
@@ -14478,7 +13525,7 @@
                 </a:solidFill>
                 <a:latin typeface="Calibri"/>
               </a:rPr>
-              <a:t>237 automated tests: 209 on the</a:t>
+              <a:t>Passwords are bcrypt-hashed, never</a:t>
             </a:r>
           </a:p>
           <a:p>
@@ -14497,7 +13544,7 @@
                 </a:solidFill>
                 <a:latin typeface="Calibri"/>
               </a:rPr>
-              <a:t>backend, 28 on the front end. Both</a:t>
+              <a:t>stored or returned. Tokens expire in 24</a:t>
             </a:r>
           </a:p>
           <a:p>
@@ -14516,7 +13563,7 @@
                 </a:solidFill>
                 <a:latin typeface="Calibri"/>
               </a:rPr>
-              <a:t>suites run on every pull request before</a:t>
+              <a:t>hours, and a failed login gives one</a:t>
             </a:r>
           </a:p>
           <a:p>
@@ -14535,7 +13582,7 @@
                 </a:solidFill>
                 <a:latin typeface="Calibri"/>
               </a:rPr>
-              <a:t>anything can merge.</a:t>
+              <a:t>generic message either way.</a:t>
             </a:r>
           </a:p>
         </p:txBody>
@@ -14548,8 +13595,8 @@
         </p:nvSpPr>
         <p:spPr>
           <a:xfrm>
-            <a:off x="4374794" y="3972433"/>
-            <a:ext cx="3442106" cy="1797431"/>
+            <a:off x="4374794" y="3763264"/>
+            <a:ext cx="3442106" cy="1588262"/>
           </a:xfrm>
           <a:prstGeom prst="roundRect">
             <a:avLst>
@@ -14582,14 +13629,14 @@
         </p:nvSpPr>
         <p:spPr>
           <a:xfrm>
-            <a:off x="4374794" y="3972433"/>
-            <a:ext cx="50292" cy="1797431"/>
+            <a:off x="4374794" y="3763264"/>
+            <a:ext cx="50292" cy="1588262"/>
           </a:xfrm>
           <a:prstGeom prst="rect">
             <a:avLst/>
           </a:prstGeom>
           <a:solidFill>
-            <a:srgbClr val="3F5C99"/>
+            <a:srgbClr val="9A4F70"/>
           </a:solidFill>
           <a:ln>
             <a:noFill/>
@@ -14612,7 +13659,7 @@
         </p:nvSpPr>
         <p:spPr>
           <a:xfrm>
-            <a:off x="4662830" y="4137533"/>
+            <a:off x="4662830" y="3928364"/>
             <a:ext cx="2989478" cy="294386"/>
           </a:xfrm>
           <a:prstGeom prst="rect">
@@ -14641,7 +13688,7 @@
                 </a:solidFill>
                 <a:latin typeface="Calibri"/>
               </a:rPr>
-              <a:t>Usability</a:t>
+              <a:t>Score integrity</a:t>
             </a:r>
           </a:p>
         </p:txBody>
@@ -14654,8 +13701,8 @@
         </p:nvSpPr>
         <p:spPr>
           <a:xfrm>
-            <a:off x="4662830" y="4533519"/>
-            <a:ext cx="2989478" cy="1045844"/>
+            <a:off x="4662830" y="4324350"/>
+            <a:ext cx="2989478" cy="627507"/>
           </a:xfrm>
           <a:prstGeom prst="rect">
             <a:avLst/>
@@ -14683,7 +13730,7 @@
                 </a:solidFill>
                 <a:latin typeface="Calibri"/>
               </a:rPr>
-              <a:t>Responsive at phone and desktop</a:t>
+              <a:t>The server decides every score, never</a:t>
             </a:r>
           </a:p>
           <a:p>
@@ -14702,7 +13749,7 @@
                 </a:solidFill>
                 <a:latin typeface="Calibri"/>
               </a:rPr>
-              <a:t>widths. Validation appears next to the</a:t>
+              <a:t>the browser, and a finished quiz cannot</a:t>
             </a:r>
           </a:p>
           <a:p>
@@ -14721,45 +13768,7 @@
                 </a:solidFill>
                 <a:latin typeface="Calibri"/>
               </a:rPr>
-              <a:t>field. Every API error arrives in one</a:t>
-            </a:r>
-          </a:p>
-          <a:p>
-            <a:pPr algn="l">
-              <a:spcBef>
-                <a:spcPts val="0"/>
-              </a:spcBef>
-              <a:spcAft>
-                <a:spcPts val="0"/>
-              </a:spcAft>
-            </a:pPr>
-            <a:r>
-              <a:rPr sz="1350" b="0">
-                <a:solidFill>
-                  <a:srgbClr val="5E6B7C"/>
-                </a:solidFill>
-                <a:latin typeface="Calibri"/>
-              </a:rPr>
-              <a:t>shape, so no screen shows a user a raw</a:t>
-            </a:r>
-          </a:p>
-          <a:p>
-            <a:pPr algn="l">
-              <a:spcBef>
-                <a:spcPts val="0"/>
-              </a:spcBef>
-              <a:spcAft>
-                <a:spcPts val="0"/>
-              </a:spcAft>
-            </a:pPr>
-            <a:r>
-              <a:rPr sz="1350" b="0">
-                <a:solidFill>
-                  <a:srgbClr val="5E6B7C"/>
-                </a:solidFill>
-                <a:latin typeface="Calibri"/>
-              </a:rPr>
-              <a:t>error object.</a:t>
+              <a:t>be replayed.</a:t>
             </a:r>
           </a:p>
         </p:txBody>
@@ -14772,8 +13781,8 @@
         </p:nvSpPr>
         <p:spPr>
           <a:xfrm>
-            <a:off x="8091220" y="3972433"/>
-            <a:ext cx="3442106" cy="1797431"/>
+            <a:off x="8091220" y="3763264"/>
+            <a:ext cx="3442106" cy="1588262"/>
           </a:xfrm>
           <a:prstGeom prst="roundRect">
             <a:avLst>
@@ -14806,14 +13815,14 @@
         </p:nvSpPr>
         <p:spPr>
           <a:xfrm>
-            <a:off x="8091220" y="3972433"/>
-            <a:ext cx="50292" cy="1797431"/>
+            <a:off x="8091220" y="3763264"/>
+            <a:ext cx="50292" cy="1588262"/>
           </a:xfrm>
           <a:prstGeom prst="rect">
             <a:avLst/>
           </a:prstGeom>
           <a:solidFill>
-            <a:srgbClr val="1F7A6B"/>
+            <a:srgbClr val="5B6472"/>
           </a:solidFill>
           <a:ln>
             <a:noFill/>
@@ -14836,7 +13845,7 @@
         </p:nvSpPr>
         <p:spPr>
           <a:xfrm>
-            <a:off x="8379256" y="4137533"/>
+            <a:off x="8379256" y="3928364"/>
             <a:ext cx="2989478" cy="294386"/>
           </a:xfrm>
           <a:prstGeom prst="rect">
@@ -14865,7 +13874,7 @@
                 </a:solidFill>
                 <a:latin typeface="Calibri"/>
               </a:rPr>
-              <a:t>Portability</a:t>
+              <a:t>Reliability</a:t>
             </a:r>
           </a:p>
         </p:txBody>
@@ -14878,8 +13887,8 @@
         </p:nvSpPr>
         <p:spPr>
           <a:xfrm>
-            <a:off x="8379256" y="4533519"/>
-            <a:ext cx="2989478" cy="836676"/>
+            <a:off x="8379256" y="4324350"/>
+            <a:ext cx="2989478" cy="627507"/>
           </a:xfrm>
           <a:prstGeom prst="rect">
             <a:avLst/>
@@ -14907,7 +13916,7 @@
                 </a:solidFill>
                 <a:latin typeface="Calibri"/>
               </a:rPr>
-              <a:t>Dependency versions are pinned so four</a:t>
+              <a:t>237 automated tests - 209 backend, 28</a:t>
             </a:r>
           </a:p>
           <a:p>
@@ -14926,7 +13935,7 @@
                 </a:solidFill>
                 <a:latin typeface="Calibri"/>
               </a:rPr>
-              <a:t>laptops and the CI runner resolve the</a:t>
+              <a:t>front end - and nothing merges until</a:t>
             </a:r>
           </a:p>
           <a:p>
@@ -14945,26 +13954,7 @@
                 </a:solidFill>
                 <a:latin typeface="Calibri"/>
               </a:rPr>
-              <a:t>same set, and the app builds and</a:t>
-            </a:r>
-          </a:p>
-          <a:p>
-            <a:pPr algn="l">
-              <a:spcBef>
-                <a:spcPts val="0"/>
-              </a:spcBef>
-              <a:spcAft>
-                <a:spcPts val="0"/>
-              </a:spcAft>
-            </a:pPr>
-            <a:r>
-              <a:rPr sz="1350" b="0">
-                <a:solidFill>
-                  <a:srgbClr val="5E6B7C"/>
-                </a:solidFill>
-                <a:latin typeface="Calibri"/>
-              </a:rPr>
-              <a:t>migrates its own database on first run.</a:t>
+              <a:t>both suites pass.</a:t>
             </a:r>
           </a:p>
         </p:txBody>
@@ -15552,7 +14542,7 @@
                 </a:solidFill>
                 <a:latin typeface="Calibri"/>
               </a:rPr>
-              <a:t>live API docs — so the front end could build against a written</a:t>
+              <a:t>live API docs - so the front end could build against a written</a:t>
             </a:r>
           </a:p>
           <a:p>
@@ -15757,7 +14747,7 @@
                 </a:solidFill>
                 <a:latin typeface="Calibri"/>
               </a:rPr>
-              <a:t>setup. SQLAlchemy keeps every query parameterised —</a:t>
+              <a:t>setup. SQLAlchemy keeps every query parameterised -</a:t>
             </a:r>
           </a:p>
           <a:p>
@@ -15776,7 +14766,7 @@
                 </a:solidFill>
                 <a:latin typeface="Calibri"/>
               </a:rPr>
-              <a:t>injection-safe by construction — and moving to PostgreSQL later</a:t>
+              <a:t>injection-safe by construction - and moving to PostgreSQL later is</a:t>
             </a:r>
           </a:p>
           <a:p>
@@ -15795,7 +14785,7 @@
                 </a:solidFill>
                 <a:latin typeface="Calibri"/>
               </a:rPr>
-              <a:t>is one connection string.</a:t>
+              <a:t>one connection string.</a:t>
             </a:r>
           </a:p>
         </p:txBody>
@@ -15809,7 +14799,7 @@
         <p:spPr>
           <a:xfrm>
             <a:off x="658368" y="3661663"/>
-            <a:ext cx="5300319" cy="1634744"/>
+            <a:ext cx="5300319" cy="1851659"/>
           </a:xfrm>
           <a:prstGeom prst="roundRect">
             <a:avLst>
@@ -15843,7 +14833,7 @@
         <p:spPr>
           <a:xfrm>
             <a:off x="658368" y="3661663"/>
-            <a:ext cx="50292" cy="1634744"/>
+            <a:ext cx="50292" cy="1851659"/>
           </a:xfrm>
           <a:prstGeom prst="rect">
             <a:avLst/>
@@ -15901,7 +14891,7 @@
                 </a:solidFill>
                 <a:latin typeface="Calibri"/>
               </a:rPr>
-              <a:t>Plain JavaScript, Bootstrap, Sass</a:t>
+              <a:t>Figma, Bootstrap and Sass</a:t>
             </a:r>
           </a:p>
         </p:txBody>
@@ -15915,7 +14905,7 @@
         <p:spPr>
           <a:xfrm>
             <a:off x="946404" y="4238243"/>
-            <a:ext cx="4847691" cy="867663"/>
+            <a:ext cx="4847691" cy="1084580"/>
           </a:xfrm>
           <a:prstGeom prst="rect">
             <a:avLst/>
@@ -15943,7 +14933,7 @@
                 </a:solidFill>
                 <a:latin typeface="Calibri"/>
               </a:rPr>
-              <a:t>A framework would have added a build step and a learning curve</a:t>
+              <a:t>Figma let us agree on every screen before anyone implemented</a:t>
             </a:r>
           </a:p>
           <a:p>
@@ -15962,7 +14952,7 @@
                 </a:solidFill>
                 <a:latin typeface="Calibri"/>
               </a:rPr>
-              <a:t>to a team of four on a semester clock. Bootstrap gave us a</a:t>
+              <a:t>it, and kept us coordinated once we started. Bootstrap's</a:t>
             </a:r>
           </a:p>
           <a:p>
@@ -15981,7 +14971,7 @@
                 </a:solidFill>
                 <a:latin typeface="Calibri"/>
               </a:rPr>
-              <a:t>responsive grid on day one; Sass gave us one shared palette</a:t>
+              <a:t>components sped up the build and gave us a responsive grid on</a:t>
             </a:r>
           </a:p>
           <a:p>
@@ -16000,7 +14990,26 @@
                 </a:solidFill>
                 <a:latin typeface="Calibri"/>
               </a:rPr>
-              <a:t>across eleven pages instead of eleven copies of it.</a:t>
+              <a:t>day one. Sass let us generate custom CSS quickly, from one</a:t>
+            </a:r>
+          </a:p>
+          <a:p>
+            <a:pPr algn="l">
+              <a:spcBef>
+                <a:spcPts val="0"/>
+              </a:spcBef>
+              <a:spcAft>
+                <a:spcPts val="0"/>
+              </a:spcAft>
+            </a:pPr>
+            <a:r>
+              <a:rPr sz="1400" b="0">
+                <a:solidFill>
+                  <a:srgbClr val="5E6B7C"/>
+                </a:solidFill>
+                <a:latin typeface="Calibri"/>
+              </a:rPr>
+              <a:t>shared palette across eleven pages.</a:t>
             </a:r>
           </a:p>
         </p:txBody>
@@ -16014,7 +15023,7 @@
         <p:spPr>
           <a:xfrm>
             <a:off x="6233007" y="3661663"/>
-            <a:ext cx="5300319" cy="1634744"/>
+            <a:ext cx="5300319" cy="1851659"/>
           </a:xfrm>
           <a:prstGeom prst="roundRect">
             <a:avLst>
@@ -16048,7 +15057,7 @@
         <p:spPr>
           <a:xfrm>
             <a:off x="6233007" y="3661663"/>
-            <a:ext cx="50292" cy="1634744"/>
+            <a:ext cx="50292" cy="1851659"/>
           </a:xfrm>
           <a:prstGeom prst="rect">
             <a:avLst/>

--- a/presentation/JobHopper_Final_Presentation.pptx
+++ b/presentation/JobHopper_Final_Presentation.pptx
@@ -710,70 +710,119 @@
           <a:lstStyle/>
           <a:p>
             <a:r>
-              <a:t>[8:00 – 9:00]   SPEAKER 3   —   LIVE DEMO. Screen share on.</a:t>
+              <a:t>[8:22 - 9:22]   SPEAKER 3   -   LIVE DEMO, PART 1.  Share your screen now.</a:t>
+            </a:r>
+          </a:p>
+          <a:p>
+            <a:r>
+              <a:t>Lines in quotes are what you say. Lines starting with &gt; are what you do.</a:t>
             </a:r>
           </a:p>
           <a:p/>
           <a:p>
             <a:r>
-              <a:t>Runbook: presentation/DEMO_RUNBOOK.md, Part 1.</a:t>
+              <a:t>&gt; Home page already open.</a:t>
             </a:r>
           </a:p>
           <a:p/>
           <a:p>
             <a:r>
-              <a:t>1. Home page. Point out the nav — rules, stack, creators. All public.</a:t>
-            </a:r>
-          </a:p>
-          <a:p>
-            <a:r>
-              <a:t>2. Game rules page briefly: three difficulties, three timers.</a:t>
-            </a:r>
-          </a:p>
-          <a:p>
-            <a:r>
-              <a:t>3. Try to hit the word cloud page while signed out. It bounces you to sign-in.</a:t>
-            </a:r>
-          </a:p>
-          <a:p>
-            <a:r>
-              <a:t>   Say out loud: "and it isn't just the page hiding a button — the API refuses</a:t>
-            </a:r>
-          </a:p>
-          <a:p>
-            <a:r>
-              <a:t>   that request too."</a:t>
-            </a:r>
-          </a:p>
-          <a:p>
-            <a:r>
-              <a:t>4. Register a new account live. Show the inline validation — type a 3-character</a:t>
-            </a:r>
-          </a:p>
-          <a:p>
-            <a:r>
-              <a:t>   username so the message appears, then fix it. The registration form also</a:t>
-            </a:r>
-          </a:p>
-          <a:p>
-            <a:r>
-              <a:t>   collects the first word-cloud search, so fill that in as you go.</a:t>
-            </a:r>
-          </a:p>
-          <a:p>
-            <a:r>
-              <a:t>5. Submitting lands you signed in, on your first word cloud. Hand over.</a:t>
+              <a:t>"This is JobHopper the way anyone arrives at it - not signed in. Rules, stack</a:t>
+            </a:r>
+          </a:p>
+          <a:p>
+            <a:r>
+              <a:t>and creators are open to everybody."</a:t>
             </a:r>
           </a:p>
           <a:p/>
           <a:p>
             <a:r>
-              <a:t>If registration fails live, fall back to the pre-made account in the runbook and</a:t>
-            </a:r>
-          </a:p>
-          <a:p>
-            <a:r>
-              <a:t>say so plainly. Do not debug on camera.</a:t>
+              <a:t>&gt; Click Game Rules. Don't scroll far.</a:t>
+            </a:r>
+          </a:p>
+          <a:p/>
+          <a:p>
+            <a:r>
+              <a:t>"Ten questions, three difficulties, each with its own clock."</a:t>
+            </a:r>
+          </a:p>
+          <a:p/>
+          <a:p>
+            <a:r>
+              <a:t>&gt; Try to open the word cloud page directly.</a:t>
+            </a:r>
+          </a:p>
+          <a:p/>
+          <a:p>
+            <a:r>
+              <a:t>"Now watch what happens if I go straight for a word cloud with no account. It</a:t>
+            </a:r>
+          </a:p>
+          <a:p>
+            <a:r>
+              <a:t>sends me to sign-in - and that's not the page hiding a button. The API refuses</a:t>
+            </a:r>
+          </a:p>
+          <a:p>
+            <a:r>
+              <a:t>the request too, so there's no way around it."</a:t>
+            </a:r>
+          </a:p>
+          <a:p/>
+          <a:p>
+            <a:r>
+              <a:t>&gt; Click Sign Up. Type a 3-character username so the validation fires.</a:t>
+            </a:r>
+          </a:p>
+          <a:p/>
+          <a:p>
+            <a:r>
+              <a:t>"So let's make one. Validation is inline, right where the problem is."</a:t>
+            </a:r>
+          </a:p>
+          <a:p/>
+          <a:p>
+            <a:r>
+              <a:t>&gt; Fix the username, then fill the rest. Job title and location are type-ahead</a:t>
+            </a:r>
+          </a:p>
+          <a:p>
+            <a:r>
+              <a:t>&gt; fields - start typing and real options drop down. Keep talking while you</a:t>
+            </a:r>
+          </a:p>
+          <a:p>
+            <a:r>
+              <a:t>&gt; type; don't narrate the typing.</a:t>
+            </a:r>
+          </a:p>
+          <a:p/>
+          <a:p>
+            <a:r>
+              <a:t>"The same form takes your first search - and those suggestions are the job</a:t>
+            </a:r>
+          </a:p>
+          <a:p>
+            <a:r>
+              <a:t>titles and locations we actually have postings for."</a:t>
+            </a:r>
+          </a:p>
+          <a:p/>
+          <a:p>
+            <a:r>
+              <a:t>&gt; Submit.</a:t>
+            </a:r>
+          </a:p>
+          <a:p/>
+          <a:p>
+            <a:r>
+              <a:t>If registration misbehaves: sign in with the backup account, say "we've already</a:t>
+            </a:r>
+          </a:p>
+          <a:p>
+            <a:r>
+              <a:t>got one set up", and carry on. Do not debug on camera.</a:t>
             </a:r>
           </a:p>
         </p:txBody>
@@ -843,84 +892,168 @@
           <a:lstStyle/>
           <a:p>
             <a:r>
-              <a:t>[9:00 – 11:00]   SPEAKER 3 and SPEAKER 4   —   LIVE DEMO. The main event.</a:t>
+              <a:t>[9:22 - 11:22]   SPEAKER 3 and SPEAKER 4   -   LIVE DEMO, PART 2. The main event.</a:t>
+            </a:r>
+          </a:p>
+          <a:p>
+            <a:r>
+              <a:t>Lines in quotes are what you say. Lines starting with &gt; are what you do.</a:t>
             </a:r>
           </a:p>
           <a:p/>
           <a:p>
             <a:r>
-              <a:t>Runbook: presentation/DEMO_RUNBOOK.md, Part 2.</a:t>
+              <a:t>&gt; You are on the cloud registration just built.</a:t>
             </a:r>
           </a:p>
           <a:p/>
           <a:p>
             <a:r>
-              <a:t>1. You are already on the cloud that registration generated. Read it out: name</a:t>
-            </a:r>
-          </a:p>
-          <a:p>
-            <a:r>
-              <a:t>   the two or three biggest words. Say what the sizing means: "the big words are</a:t>
-            </a:r>
-          </a:p>
-          <a:p>
-            <a:r>
-              <a:t>   in the most postings — that's a count, not an opinion."</a:t>
-            </a:r>
-          </a:p>
-          <a:p>
-            <a:r>
-              <a:t>2. Optional, if you have the time: profile → Generate New Word Cloud → change the</a:t>
-            </a:r>
-          </a:p>
-          <a:p>
-            <a:r>
-              <a:t>   role and the shape, and show a second cloud coming back different.</a:t>
-            </a:r>
-          </a:p>
-          <a:p>
-            <a:r>
-              <a:t>3. Click a big skill. Difficulty screen. Pick Medium — 2:00 is long enough to show</a:t>
-            </a:r>
-          </a:p>
-          <a:p>
-            <a:r>
-              <a:t>   and short enough to stay inside our slot.</a:t>
-            </a:r>
-          </a:p>
-          <a:p>
-            <a:r>
-              <a:t>4. Play three or four questions. Deliberately get one wrong so the live feedback</a:t>
-            </a:r>
-          </a:p>
-          <a:p>
-            <a:r>
-              <a:t>   and the score behaviour are both visible. Point at the clock.</a:t>
-            </a:r>
-          </a:p>
-          <a:p>
-            <a:r>
-              <a:t>5. Do NOT play all ten on camera. Jump to the profile page.</a:t>
-            </a:r>
-          </a:p>
-          <a:p>
-            <a:r>
-              <a:t>6. Profile: the search you just ran is under Recent Word Clouds; the attempt you</a:t>
-            </a:r>
-          </a:p>
-          <a:p>
-            <a:r>
-              <a:t>   just made is under Recent Game History. Say: "we didn't refresh anything —</a:t>
-            </a:r>
-          </a:p>
-          <a:p>
-            <a:r>
-              <a:t>   that's the database answering."</a:t>
-            </a:r>
-          </a:p>
-          <a:p>
-            <a:r>
-              <a:t>7. Click Search Again on a saved cloud to show it re-runs.</a:t>
+              <a:t>"Here's what that search produced. The biggest words are the ones that appeared</a:t>
+            </a:r>
+          </a:p>
+          <a:p>
+            <a:r>
+              <a:t>in the most postings for that role - that's a count, not our opinion. Anything</a:t>
+            </a:r>
+          </a:p>
+          <a:p>
+            <a:r>
+              <a:t>we have questions for is clickable."</a:t>
+            </a:r>
+          </a:p>
+          <a:p/>
+          <a:p>
+            <a:r>
+              <a:t>&gt; Click one of the biggest skills.</a:t>
+            </a:r>
+          </a:p>
+          <a:p/>
+          <a:p>
+            <a:r>
+              <a:t>"So let's take that one."</a:t>
+            </a:r>
+          </a:p>
+          <a:p/>
+          <a:p>
+            <a:r>
+              <a:t>&gt; Difficulty screen. Choose EASY - three minutes, so you can finish all ten.</a:t>
+            </a:r>
+          </a:p>
+          <a:p>
+            <a:r>
+              <a:t>&gt; The score is only saved when the quiz is submitted, and that happens on the</a:t>
+            </a:r>
+          </a:p>
+          <a:p>
+            <a:r>
+              <a:t>&gt; tenth answer or when the clock runs out. Stopping early means an empty game</a:t>
+            </a:r>
+          </a:p>
+          <a:p>
+            <a:r>
+              <a:t>&gt; history on the profile.</a:t>
+            </a:r>
+          </a:p>
+          <a:p/>
+          <a:p>
+            <a:r>
+              <a:t>"Three difficulties, three timers. I'll take easy - three minutes."</a:t>
+            </a:r>
+          </a:p>
+          <a:p/>
+          <a:p>
+            <a:r>
+              <a:t>&gt; Answer one question correctly.</a:t>
+            </a:r>
+          </a:p>
+          <a:p/>
+          <a:p>
+            <a:r>
+              <a:t>"It tells me straight away whether I got it. It can do that safely because my</a:t>
+            </a:r>
+          </a:p>
+          <a:p>
+            <a:r>
+              <a:t>answer is already locked in on the server before I'm told - so knowing it now</a:t>
+            </a:r>
+          </a:p>
+          <a:p>
+            <a:r>
+              <a:t>can't change what I picked."</a:t>
+            </a:r>
+          </a:p>
+          <a:p/>
+          <a:p>
+            <a:r>
+              <a:t>&gt; Answer the next one wrong, on purpose.</a:t>
+            </a:r>
+          </a:p>
+          <a:p/>
+          <a:p>
+            <a:r>
+              <a:t>"And there's the other case. It shows me the right answer, and the clock pauses</a:t>
+            </a:r>
+          </a:p>
+          <a:p>
+            <a:r>
+              <a:t>while I'm reading it."</a:t>
+            </a:r>
+          </a:p>
+          <a:p/>
+          <a:p>
+            <a:r>
+              <a:t>&gt; Now click through questions 3 to 10 without narrating each one. About</a:t>
+            </a:r>
+          </a:p>
+          <a:p>
+            <a:r>
+              <a:t>&gt; sixty seconds if you don't read them aloud.</a:t>
+            </a:r>
+          </a:p>
+          <a:p/>
+          <a:p>
+            <a:r>
+              <a:t>"I'll speed through the rest of these."</a:t>
+            </a:r>
+          </a:p>
+          <a:p/>
+          <a:p>
+            <a:r>
+              <a:t>&gt; The Submit button is replaced by a return button. Click it.</a:t>
+            </a:r>
+          </a:p>
+          <a:p/>
+          <a:p>
+            <a:r>
+              <a:t>"That's graded and saved. This is my profile - the search I ran is under recent</a:t>
+            </a:r>
+          </a:p>
+          <a:p>
+            <a:r>
+              <a:t>word clouds, and the quiz I just played is under game history, score and all.</a:t>
+            </a:r>
+          </a:p>
+          <a:p>
+            <a:r>
+              <a:t>We didn't refresh anything, and none of this is hard-coded. That's the database</a:t>
+            </a:r>
+          </a:p>
+          <a:p>
+            <a:r>
+              <a:t>answering."</a:t>
+            </a:r>
+          </a:p>
+          <a:p/>
+          <a:p>
+            <a:r>
+              <a:t>&gt; Click Search Again on the saved cloud.</a:t>
+            </a:r>
+          </a:p>
+          <a:p/>
+          <a:p>
+            <a:r>
+              <a:t>"And any saved search re-runs in one click."</a:t>
             </a:r>
           </a:p>
         </p:txBody>
@@ -990,85 +1123,113 @@
           <a:lstStyle/>
           <a:p>
             <a:r>
-              <a:t>[11:00 – 12:00]   SPEAKER 4   —   LIVE DEMO. This is the 9-point rubric item.</a:t>
+              <a:t>[11:22 - 12:22]   SPEAKER 4   -   LIVE DEMO, PART 3. This is the 9-point item.</a:t>
+            </a:r>
+          </a:p>
+          <a:p>
+            <a:r>
+              <a:t>Switch to the DB Browser window already open on the second desktop. Do not open</a:t>
+            </a:r>
+          </a:p>
+          <a:p>
+            <a:r>
+              <a:t>a terminal - that reads as code.</a:t>
             </a:r>
           </a:p>
           <a:p/>
           <a:p>
             <a:r>
-              <a:t>Runbook: presentation/DEMO_RUNBOOK.md, Part 3. Use the DB Browser for SQLite</a:t>
-            </a:r>
-          </a:p>
-          <a:p>
-            <a:r>
-              <a:t>window already open on the second desktop — don't open a terminal and type</a:t>
-            </a:r>
-          </a:p>
-          <a:p>
-            <a:r>
-              <a:t>commands on camera, it reads as code.</a:t>
+              <a:t>&gt; Show the table list in the sidebar.</a:t>
             </a:r>
           </a:p>
           <a:p/>
           <a:p>
             <a:r>
-              <a:t>1. Show the table list. Say: "fourteen tables — the same fourteen you just saw in</a:t>
-            </a:r>
-          </a:p>
-          <a:p>
-            <a:r>
-              <a:t>   the ERD. The diagram isn't a drawing of what we planned, it's what's actually</a:t>
-            </a:r>
-          </a:p>
-          <a:p>
-            <a:r>
-              <a:t>   in the file."</a:t>
-            </a:r>
-          </a:p>
-          <a:p>
-            <a:r>
-              <a:t>2. Open SEARCHES. The row from ninety seconds ago is at the bottom — the role, the</a:t>
-            </a:r>
-          </a:p>
-          <a:p>
-            <a:r>
-              <a:t>   salary, the shape, the timestamp, and a user_id pointing at the account we</a:t>
-            </a:r>
-          </a:p>
-          <a:p>
-            <a:r>
-              <a:t>   registered on camera.</a:t>
-            </a:r>
-          </a:p>
-          <a:p>
-            <a:r>
-              <a:t>3. Open GAME_ATTEMPTS. Same story: skill, difficulty, score, seconds taken.</a:t>
-            </a:r>
-          </a:p>
-          <a:p>
-            <a:r>
-              <a:t>4. Open USERS. Show the password column. It's a bcrypt hash. Say: "we couldn't</a:t>
-            </a:r>
-          </a:p>
-          <a:p>
-            <a:r>
-              <a:t>   tell you that user's password if we wanted to. We never stored it."</a:t>
-            </a:r>
-          </a:p>
-          <a:p>
-            <a:r>
-              <a:t>5. Show the word-cloud counts next to the picture: same numbers.</a:t>
+              <a:t>"Last thing - proof this is really sitting in a database. There are our fourteen</a:t>
+            </a:r>
+          </a:p>
+          <a:p>
+            <a:r>
+              <a:t>tables, the same fourteen from the ERD. That diagram isn't what we planned; it's</a:t>
+            </a:r>
+          </a:p>
+          <a:p>
+            <a:r>
+              <a:t>what's in the file."</a:t>
             </a:r>
           </a:p>
           <a:p/>
           <a:p>
             <a:r>
-              <a:t>Close with: "everything you saw on screen came out of this file. Nothing on any</a:t>
-            </a:r>
-          </a:p>
-          <a:p>
-            <a:r>
-              <a:t>page is hard-coded."</a:t>
+              <a:t>&gt; DB Browser lists fifteen. The extra one is sqlite_stat1, which SQLite makes</a:t>
+            </a:r>
+          </a:p>
+          <a:p>
+            <a:r>
+              <a:t>&gt; for its own query statistics. Say "our fourteen tables", not "fourteen</a:t>
+            </a:r>
+          </a:p>
+          <a:p>
+            <a:r>
+              <a:t>&gt; tables", so the count on screen doesn't catch you out.</a:t>
+            </a:r>
+          </a:p>
+          <a:p/>
+          <a:p>
+            <a:r>
+              <a:t>&gt; Browse Data, searches table, scroll to the last row.</a:t>
+            </a:r>
+          </a:p>
+          <a:p/>
+          <a:p>
+            <a:r>
+              <a:t>"The bottom row is the search from ninety seconds ago - role, salary, shape,</a:t>
+            </a:r>
+          </a:p>
+          <a:p>
+            <a:r>
+              <a:t>timestamp, and a user_id pointing at the account we made on camera."</a:t>
+            </a:r>
+          </a:p>
+          <a:p/>
+          <a:p>
+            <a:r>
+              <a:t>&gt; Switch to game_attempts.</a:t>
+            </a:r>
+          </a:p>
+          <a:p/>
+          <a:p>
+            <a:r>
+              <a:t>"Same for the quiz. Skill, difficulty, score, seconds taken."</a:t>
+            </a:r>
+          </a:p>
+          <a:p/>
+          <a:p>
+            <a:r>
+              <a:t>&gt; Switch to users. Point at the password_hash column.</a:t>
+            </a:r>
+          </a:p>
+          <a:p/>
+          <a:p>
+            <a:r>
+              <a:t>"And this is the users table. That's a bcrypt hash. We couldn't tell you that</a:t>
+            </a:r>
+          </a:p>
+          <a:p>
+            <a:r>
+              <a:t>password if we wanted to - we never stored it."</a:t>
+            </a:r>
+          </a:p>
+          <a:p/>
+          <a:p>
+            <a:r>
+              <a:t>&gt; Stop sharing, back to the deck.</a:t>
+            </a:r>
+          </a:p>
+          <a:p/>
+          <a:p>
+            <a:r>
+              <a:t>"Everything you just saw came out of that one file."</a:t>
             </a:r>
           </a:p>
         </p:txBody>
@@ -1150,27 +1311,17 @@
           <a:p/>
           <a:p>
             <a:r>
-              <a:t>On the left, what worked. Registration and sign-in, real postings parsed into a</a:t>
-            </a:r>
-          </a:p>
-          <a:p>
-            <a:r>
-              <a:t>cloud from whatever the user asked for, the timed game with live scoring, every</a:t>
-            </a:r>
-          </a:p>
-          <a:p>
-            <a:r>
-              <a:t>result saved. The question bank beat its own target - we aimed for ten per skill</a:t>
-            </a:r>
-          </a:p>
-          <a:p>
-            <a:r>
-              <a:t>per difficulty and shipped fifteen, so 1,260 questions. And 237 tests on every</a:t>
-            </a:r>
-          </a:p>
-          <a:p>
-            <a:r>
-              <a:t>pull request.</a:t>
+              <a:t>On the left, what worked. Everything you just saw, plus a question bank that beat</a:t>
+            </a:r>
+          </a:p>
+          <a:p>
+            <a:r>
+              <a:t>its own target - we aimed for ten per skill per difficulty and shipped fifteen,</a:t>
+            </a:r>
+          </a:p>
+          <a:p>
+            <a:r>
+              <a:t>so 1,260 questions. And 237 tests on every pull request.</a:t>
             </a:r>
           </a:p>
           <a:p/>
@@ -1197,12 +1348,12 @@
           <a:p/>
           <a:p>
             <a:r>
-              <a:t>The rest is us choosing depth over breadth - and one place where our</a:t>
-            </a:r>
-          </a:p>
-          <a:p>
-            <a:r>
-              <a:t>documentation got ahead of the app, which is on us.</a:t>
+              <a:t>The rest is choosing depth over breadth - and one place where our documentation</a:t>
+            </a:r>
+          </a:p>
+          <a:p>
+            <a:r>
+              <a:t>got ahead of the app, which is on us.</a:t>
             </a:r>
           </a:p>
         </p:txBody>
@@ -1875,49 +2026,38 @@
           <a:p/>
           <a:p>
             <a:r>
-              <a:t>Top: the browser. Eleven HTML pages, Bootstrap for the grid, Sass compiled to one</a:t>
-            </a:r>
-          </a:p>
-          <a:p>
-            <a:r>
-              <a:t>stylesheet, plain JavaScript modules. No framework, no build step.</a:t>
+              <a:t>Top: the browser. Eleven HTML pages, Bootstrap, Sass, plain JavaScript modules -</a:t>
+            </a:r>
+          </a:p>
+          <a:p>
+            <a:r>
+              <a:t>no framework, no build step. It talks to exactly one thing, our API, and</a:t>
+            </a:r>
+          </a:p>
+          <a:p>
+            <a:r>
+              <a:t>anything tied to an account carries a signed token.</a:t>
             </a:r>
           </a:p>
           <a:p/>
           <a:p>
             <a:r>
-              <a:t>The browser talks to exactly one thing - our API. JSON over HTTP, and anything</a:t>
-            </a:r>
-          </a:p>
-          <a:p>
-            <a:r>
-              <a:t>tied to an account carries a signed token.</a:t>
-            </a:r>
-          </a:p>
-          <a:p/>
-          <a:p>
-            <a:r>
-              <a:t>The middle band is where every rule lives: FastAPI, sixteen endpoints across six</a:t>
-            </a:r>
-          </a:p>
-          <a:p>
-            <a:r>
-              <a:t>routers, Pydantic validating every request and response. Underneath sit the</a:t>
-            </a:r>
-          </a:p>
-          <a:p>
-            <a:r>
-              <a:t>services - hashing and tokens, skill extraction, and the ingest that keeps our</a:t>
-            </a:r>
-          </a:p>
-          <a:p>
-            <a:r>
-              <a:t>data current. On the right, note that our postings are real, pulled from a live</a:t>
-            </a:r>
-          </a:p>
-          <a:p>
-            <a:r>
-              <a:t>job-search API.</a:t>
+              <a:t>The middle band is where every rule lives: FastAPI, sixteen endpoints, Pydantic</a:t>
+            </a:r>
+          </a:p>
+          <a:p>
+            <a:r>
+              <a:t>validating every request and response, and underneath it the services - hashing</a:t>
+            </a:r>
+          </a:p>
+          <a:p>
+            <a:r>
+              <a:t>and tokens, skill extraction, and the ingest that keeps our data current. Note</a:t>
+            </a:r>
+          </a:p>
+          <a:p>
+            <a:r>
+              <a:t>on the right that our postings are real, pulled from a live job-search API.</a:t>
             </a:r>
           </a:p>
           <a:p/>
@@ -2037,38 +2177,38 @@
           </a:p>
           <a:p>
             <a:r>
-              <a:t>identical database with zero setup. That removed a whole category of "works on</a:t>
-            </a:r>
-          </a:p>
-          <a:p>
-            <a:r>
-              <a:t>my machine". And SQLAlchemy keeps every query parameterised, so we're</a:t>
-            </a:r>
-          </a:p>
-          <a:p>
-            <a:r>
-              <a:t>injection-safe by construction.</a:t>
+              <a:t>identical database with zero setup - which removed a whole category of "works on</a:t>
+            </a:r>
+          </a:p>
+          <a:p>
+            <a:r>
+              <a:t>my machine". SQLAlchemy keeps every query parameterised, so we're injection-safe</a:t>
+            </a:r>
+          </a:p>
+          <a:p>
+            <a:r>
+              <a:t>by construction.</a:t>
             </a:r>
           </a:p>
           <a:p/>
           <a:p>
             <a:r>
-              <a:t>On the front end - Figma first. We designed every screen before anyone built it,</a:t>
-            </a:r>
-          </a:p>
-          <a:p>
-            <a:r>
-              <a:t>which kept four people from producing four different-looking pages. Bootstrap's</a:t>
-            </a:r>
-          </a:p>
-          <a:p>
-            <a:r>
-              <a:t>components sped the build up and gave us a responsive grid immediately, and Sass</a:t>
-            </a:r>
-          </a:p>
-          <a:p>
-            <a:r>
-              <a:t>let us generate custom CSS from one shared palette across eleven pages.</a:t>
+              <a:t>On the front end, Figma first. We designed every screen before anyone built it,</a:t>
+            </a:r>
+          </a:p>
+          <a:p>
+            <a:r>
+              <a:t>which kept four people from producing four different-looking pages. Bootstrap</a:t>
+            </a:r>
+          </a:p>
+          <a:p>
+            <a:r>
+              <a:t>gave us a responsive grid on day one, and Sass gave us one shared palette across</a:t>
+            </a:r>
+          </a:p>
+          <a:p>
+            <a:r>
+              <a:t>eleven pages.</a:t>
             </a:r>
           </a:p>
           <a:p/>
@@ -2300,28 +2440,23 @@
           </a:p>
           <a:p>
             <a:r>
-              <a:t>skill, and that's what guarantees one posting can only count once toward any</a:t>
-            </a:r>
-          </a:p>
-          <a:p>
-            <a:r>
-              <a:t>given skill.</a:t>
+              <a:t>skill, which is what guarantees one posting can only count once toward a skill.</a:t>
             </a:r>
           </a:p>
           <a:p/>
           <a:p>
             <a:r>
-              <a:t>So the word cloud is one query: take the postings for this role inside the date</a:t>
-            </a:r>
-          </a:p>
-          <a:p>
-            <a:r>
-              <a:t>window, join through job_skills, count distinct postings per skill, sort</a:t>
-            </a:r>
-          </a:p>
-          <a:p>
-            <a:r>
-              <a:t>descending. That count is the word size.</a:t>
+              <a:t>So the word cloud is one query: the postings for this role inside the date</a:t>
+            </a:r>
+          </a:p>
+          <a:p>
+            <a:r>
+              <a:t>window, joined through job_skills, counted per skill, sorted descending. That</a:t>
+            </a:r>
+          </a:p>
+          <a:p>
+            <a:r>
+              <a:t>count is the word size.</a:t>
             </a:r>
           </a:p>
           <a:p/>
@@ -2332,7 +2467,7 @@
           </a:p>
           <a:p>
             <a:r>
-              <a:t>by difficulty; each has its ANSWER_OPTIONS, one flagged correct - and that flag</a:t>
+              <a:t>by difficulty, each with its ANSWER_OPTIONS - one flagged correct, and that flag</a:t>
             </a:r>
           </a:p>
           <a:p>

--- a/presentation/JobHopper_Final_Presentation.pptx
+++ b/presentation/JobHopper_Final_Presentation.pptx
@@ -516,7 +516,7 @@
           <a:lstStyle/>
           <a:p>
             <a:r>
-              <a:t>[0:00 - 0:15]   SPEAKER 1</a:t>
+              <a:t>[0:00 - 0:16]   SPEAKER 1</a:t>
             </a:r>
           </a:p>
           <a:p/>
@@ -602,7 +602,7 @@
           <a:lstStyle/>
           <a:p>
             <a:r>
-              <a:t>[7:55 - 8:30]   SPEAKER 1   -   sets up the demo</a:t>
+              <a:t>[7:11 - 7:47]   SPEAKER 1   -   sets up the demo</a:t>
             </a:r>
           </a:p>
           <a:p/>
@@ -710,7 +710,7 @@
           <a:lstStyle/>
           <a:p>
             <a:r>
-              <a:t>[8:22 - 9:22]   SPEAKER 3   -   LIVE DEMO, PART 1.  Share your screen now.</a:t>
+              <a:t>[7:47 - 9:17]   SPEAKER 3   -   LIVE DEMO, PART 1.  Share your screen now.</a:t>
             </a:r>
           </a:p>
           <a:p>
@@ -892,7 +892,7 @@
           <a:lstStyle/>
           <a:p>
             <a:r>
-              <a:t>[9:22 - 11:22]   SPEAKER 3 and SPEAKER 4   -   LIVE DEMO, PART 2. The main event.</a:t>
+              <a:t>[9:17 - 12:17]   SPEAKER 3 and SPEAKER 4   -   LIVE DEMO, PART 2. The main event.</a:t>
             </a:r>
           </a:p>
           <a:p>
@@ -1123,7 +1123,7 @@
           <a:lstStyle/>
           <a:p>
             <a:r>
-              <a:t>[11:22 - 12:22]   SPEAKER 4   -   LIVE DEMO, PART 3. This is the 9-point item.</a:t>
+              <a:t>[12:17 - 13:27]   SPEAKER 4   -   LIVE DEMO, PART 3. This is the 9-point item.</a:t>
             </a:r>
           </a:p>
           <a:p>
@@ -1299,7 +1299,7 @@
           <a:lstStyle/>
           <a:p>
             <a:r>
-              <a:t>[11:20 - 12:10]   SPEAKER 1</a:t>
+              <a:t>[13:28 - 14:12]   SPEAKER 1</a:t>
             </a:r>
           </a:p>
           <a:p/>
@@ -1321,7 +1321,7 @@
           </a:p>
           <a:p>
             <a:r>
-              <a:t>so 1,260 questions. And 237 tests on every pull request.</a:t>
+              <a:t>so 1,260 questions. And 250 tests on every pull request.</a:t>
             </a:r>
           </a:p>
           <a:p/>
@@ -1348,12 +1348,7 @@
           <a:p/>
           <a:p>
             <a:r>
-              <a:t>The rest is choosing depth over breadth - and one place where our documentation</a:t>
-            </a:r>
-          </a:p>
-          <a:p>
-            <a:r>
-              <a:t>got ahead of the app, which is on us.</a:t>
+              <a:t>The rest is choosing depth over breadth.</a:t>
             </a:r>
           </a:p>
         </p:txBody>
@@ -1423,28 +1418,28 @@
           <a:lstStyle/>
           <a:p>
             <a:r>
-              <a:t>[12:30 - 13:00]   SPEAKER 1   -   close</a:t>
+              <a:t>[14:12 - 14:44]   SPEAKER 1   -   close</a:t>
             </a:r>
           </a:p>
           <a:p/>
           <a:p>
             <a:r>
-              <a:t>Three things next. Ship the roadmap screen - the API is already there. Widen the</a:t>
-            </a:r>
-          </a:p>
-          <a:p>
-            <a:r>
-              <a:t>ingest; the pipeline isn't the limit, the skill vocabulary is. And the one we</a:t>
-            </a:r>
-          </a:p>
-          <a:p>
-            <a:r>
-              <a:t>actually want: close the loop, so the skills you keep getting wrong become the</a:t>
-            </a:r>
-          </a:p>
-          <a:p>
-            <a:r>
-              <a:t>ones your cloud puts in front of you.</a:t>
+              <a:t>Three things next. Rank the roadmap by what you're weak at, not just by what the</a:t>
+            </a:r>
+          </a:p>
+          <a:p>
+            <a:r>
+              <a:t>market wants. Widen the ingest; the pipeline isn't the limit, the skill</a:t>
+            </a:r>
+          </a:p>
+          <a:p>
+            <a:r>
+              <a:t>vocabulary is. And the one we actually want: close the loop, so the skills you</a:t>
+            </a:r>
+          </a:p>
+          <a:p>
+            <a:r>
+              <a:t>keep getting wrong become the ones your cloud puts in front of you.</a:t>
             </a:r>
           </a:p>
           <a:p/>
@@ -1532,7 +1527,7 @@
           <a:lstStyle/>
           <a:p>
             <a:r>
-              <a:t>[0:15 - 1:00]   SPEAKER 1</a:t>
+              <a:t>[0:16 - 1:06]   SPEAKER 1</a:t>
             </a:r>
           </a:p>
           <a:p/>
@@ -1553,23 +1548,23 @@
           </a:p>
           <a:p>
             <a:r>
-              <a:t>forty postings to find it. So people guess at what to learn next.</a:t>
+              <a:t>forty postings to find it.</a:t>
             </a:r>
           </a:p>
           <a:p/>
           <a:p>
             <a:r>
-              <a:t>So our goal was this: analyse the job postings for a target role, identify the</a:t>
-            </a:r>
-          </a:p>
-          <a:p>
-            <a:r>
-              <a:t>most in-demand skills, and show them as a word cloud - then help people actually</a:t>
-            </a:r>
-          </a:p>
-          <a:p>
-            <a:r>
-              <a:t>build those skills through interactive Q&amp;A games.</a:t>
+              <a:t>So our goal: analyse the postings for a target role, identify the most in-demand</a:t>
+            </a:r>
+          </a:p>
+          <a:p>
+            <a:r>
+              <a:t>skills, show them as a word cloud - then help people build those skills through</a:t>
+            </a:r>
+          </a:p>
+          <a:p>
+            <a:r>
+              <a:t>interactive Q&amp;A games.</a:t>
             </a:r>
           </a:p>
           <a:p/>
@@ -1655,7 +1650,7 @@
           <a:lstStyle/>
           <a:p>
             <a:r>
-              <a:t>[1:00 - 1:50]   SPEAKER 2</a:t>
+              <a:t>[1:06 - 1:51]   SPEAKER 2</a:t>
             </a:r>
           </a:p>
           <a:p/>
@@ -1773,7 +1768,7 @@
           <a:lstStyle/>
           <a:p>
             <a:r>
-              <a:t>[1:50 - 2:40]   SPEAKER 2</a:t>
+              <a:t>[1:52 - 2:44]   SPEAKER 2</a:t>
             </a:r>
           </a:p>
           <a:p/>
@@ -1896,7 +1891,7 @@
           <a:lstStyle/>
           <a:p>
             <a:r>
-              <a:t>[2:40 - 3:30]   SPEAKER 2</a:t>
+              <a:t>[2:45 - 3:33]   SPEAKER 2</a:t>
             </a:r>
           </a:p>
           <a:p/>
@@ -1944,7 +1939,7 @@
           </a:p>
           <a:p>
             <a:r>
-              <a:t>237 tests, with nothing merging until both suites pass.</a:t>
+              <a:t>250 tests, with nothing merging until both suites pass.</a:t>
             </a:r>
           </a:p>
         </p:txBody>
@@ -2014,7 +2009,7 @@
           <a:lstStyle/>
           <a:p>
             <a:r>
-              <a:t>[3:45 - 4:40]   SPEAKER 3</a:t>
+              <a:t>[3:33 - 4:21]   SPEAKER 3</a:t>
             </a:r>
           </a:p>
           <a:p/>
@@ -2042,7 +2037,7 @@
           <a:p/>
           <a:p>
             <a:r>
-              <a:t>The middle band is where every rule lives: FastAPI, sixteen endpoints, Pydantic</a:t>
+              <a:t>The middle band is where every rule lives: FastAPI, seventeen endpoints, Pydantic</a:t>
             </a:r>
           </a:p>
           <a:p>
@@ -2052,12 +2047,7 @@
           </a:p>
           <a:p>
             <a:r>
-              <a:t>and tokens, skill extraction, and the ingest that keeps our data current. Note</a:t>
-            </a:r>
-          </a:p>
-          <a:p>
-            <a:r>
-              <a:t>on the right that our postings are real, pulled from a live job-search API.</a:t>
+              <a:t>and tokens, skill extraction, and the ingest that keeps our postings current.</a:t>
             </a:r>
           </a:p>
           <a:p/>
@@ -2144,7 +2134,7 @@
           <a:lstStyle/>
           <a:p>
             <a:r>
-              <a:t>[4:40 - 5:35]   SPEAKER 3</a:t>
+              <a:t>[4:22 - 5:16]   SPEAKER 3</a:t>
             </a:r>
           </a:p>
           <a:p/>
@@ -2156,17 +2146,17 @@
           <a:p/>
           <a:p>
             <a:r>
-              <a:t>Python and FastAPI: Python is the strongest shared language on this team, and</a:t>
-            </a:r>
-          </a:p>
-          <a:p>
-            <a:r>
-              <a:t>FastAPI gave us validation for free plus live API docs - so the front end could</a:t>
-            </a:r>
-          </a:p>
-          <a:p>
-            <a:r>
-              <a:t>build against a written contract instead of waiting for the backend.</a:t>
+              <a:t>Python and FastAPI: the strongest shared language on this team, and FastAPI gave</a:t>
+            </a:r>
+          </a:p>
+          <a:p>
+            <a:r>
+              <a:t>us validation for free plus live API docs - so the front end could build against</a:t>
+            </a:r>
+          </a:p>
+          <a:p>
+            <a:r>
+              <a:t>a written contract instead of waiting for the backend.</a:t>
             </a:r>
           </a:p>
           <a:p/>
@@ -2177,23 +2167,18 @@
           </a:p>
           <a:p>
             <a:r>
-              <a:t>identical database with zero setup - which removed a whole category of "works on</a:t>
-            </a:r>
-          </a:p>
-          <a:p>
-            <a:r>
-              <a:t>my machine". SQLAlchemy keeps every query parameterised, so we're injection-safe</a:t>
-            </a:r>
-          </a:p>
-          <a:p>
-            <a:r>
-              <a:t>by construction.</a:t>
+              <a:t>identical database with zero setup. SQLAlchemy keeps every query parameterised,</a:t>
+            </a:r>
+          </a:p>
+          <a:p>
+            <a:r>
+              <a:t>so we're injection-safe by construction.</a:t>
             </a:r>
           </a:p>
           <a:p/>
           <a:p>
             <a:r>
-              <a:t>On the front end, Figma first. We designed every screen before anyone built it,</a:t>
+              <a:t>On the front end, Figma first - we designed every screen before anyone built it,</a:t>
             </a:r>
           </a:p>
           <a:p>
@@ -2203,23 +2188,23 @@
           </a:p>
           <a:p>
             <a:r>
-              <a:t>gave us a responsive grid on day one, and Sass gave us one shared palette across</a:t>
-            </a:r>
-          </a:p>
-          <a:p>
-            <a:r>
-              <a:t>eleven pages.</a:t>
+              <a:t>gave us a responsive grid on day one, Sass one shared palette across twelve</a:t>
+            </a:r>
+          </a:p>
+          <a:p>
+            <a:r>
+              <a:t>pages.</a:t>
             </a:r>
           </a:p>
           <a:p/>
           <a:p>
             <a:r>
-              <a:t>And GitHub Actions - the cheapest way to stop four people breaking each other's</a:t>
-            </a:r>
-          </a:p>
-          <a:p>
-            <a:r>
-              <a:t>work.</a:t>
+              <a:t>And GitHub Actions, so a regression is caught by the robot, not by whoever pulls</a:t>
+            </a:r>
+          </a:p>
+          <a:p>
+            <a:r>
+              <a:t>next.</a:t>
             </a:r>
           </a:p>
         </p:txBody>
@@ -2289,7 +2274,7 @@
           <a:lstStyle/>
           <a:p>
             <a:r>
-              <a:t>[5:50 - 6:30]   SPEAKER 4</a:t>
+              <a:t>[5:16 - 5:56]   SPEAKER 4</a:t>
             </a:r>
           </a:p>
           <a:p/>
@@ -2402,7 +2387,7 @@
           <a:lstStyle/>
           <a:p>
             <a:r>
-              <a:t>[6:15 - 7:35]   SPEAKER 4   -   Trace each table with the cursor as you name it.</a:t>
+              <a:t>[5:57 - 7:11]   SPEAKER 4   -   Trace each table with the cursor as you name it.</a:t>
             </a:r>
           </a:p>
           <a:p/>
@@ -2440,7 +2425,7 @@
           </a:p>
           <a:p>
             <a:r>
-              <a:t>skill, which is what guarantees one posting can only count once toward a skill.</a:t>
+              <a:t>skill, which guarantees one posting can only count once toward a skill.</a:t>
             </a:r>
           </a:p>
           <a:p/>
@@ -2462,33 +2447,28 @@
           <a:p/>
           <a:p>
             <a:r>
-              <a:t>Follow SKILLS right and it becomes the quiz. One skill has many QUESTIONS split</a:t>
-            </a:r>
-          </a:p>
-          <a:p>
-            <a:r>
-              <a:t>by difficulty, each with its ANSWER_OPTIONS - one flagged correct, and that flag</a:t>
-            </a:r>
-          </a:p>
-          <a:p>
-            <a:r>
-              <a:t>never leaves the server.</a:t>
+              <a:t>Follow SKILLS right and it becomes the quiz - QUESTIONS split by difficulty, each</a:t>
+            </a:r>
+          </a:p>
+          <a:p>
+            <a:r>
+              <a:t>with its ANSWER_OPTIONS, one flagged correct. That flag never leaves the server.</a:t>
             </a:r>
           </a:p>
           <a:p/>
           <a:p>
             <a:r>
-              <a:t>Starting a quiz creates a QUIZ_SESSION recording which questions went out and</a:t>
-            </a:r>
-          </a:p>
-          <a:p>
-            <a:r>
-              <a:t>what you picked - that is what makes live scoring trustworthy, and what stops a</a:t>
-            </a:r>
-          </a:p>
-          <a:p>
-            <a:r>
-              <a:t>finished quiz being replayed. Submitting lands the result in GAME_ATTEMPTS.</a:t>
+              <a:t>Starting a quiz creates a QUIZ_SESSION recording what was served and what you</a:t>
+            </a:r>
+          </a:p>
+          <a:p>
+            <a:r>
+              <a:t>picked, which is what makes live scoring trustworthy. Submitting lands the result</a:t>
+            </a:r>
+          </a:p>
+          <a:p>
+            <a:r>
+              <a:t>in GAME_ATTEMPTS.</a:t>
             </a:r>
           </a:p>
           <a:p/>
@@ -8778,7 +8758,7 @@
         <p:spPr>
           <a:xfrm>
             <a:off x="658368" y="1955546"/>
-            <a:ext cx="5300319" cy="3834892"/>
+            <a:ext cx="5300319" cy="4051807"/>
           </a:xfrm>
           <a:prstGeom prst="roundRect">
             <a:avLst>
@@ -8812,7 +8792,7 @@
         <p:spPr>
           <a:xfrm>
             <a:off x="658368" y="1955546"/>
-            <a:ext cx="50292" cy="3834892"/>
+            <a:ext cx="50292" cy="4051807"/>
           </a:xfrm>
           <a:prstGeom prst="rect">
             <a:avLst/>
@@ -8884,7 +8864,7 @@
         <p:spPr>
           <a:xfrm>
             <a:off x="946404" y="2563114"/>
-            <a:ext cx="4847691" cy="2602992"/>
+            <a:ext cx="4847691" cy="3253740"/>
           </a:xfrm>
           <a:prstGeom prst="rect">
             <a:avLst/>
@@ -9007,6 +8987,44 @@
                 </a:solidFill>
                 <a:latin typeface="Calibri"/>
               </a:rPr>
+              <a:t>▸ The prep roadmap ranks a role's skills by demand and tracks</a:t>
+            </a:r>
+          </a:p>
+          <a:p>
+            <a:pPr algn="l">
+              <a:spcBef>
+                <a:spcPts val="0"/>
+              </a:spcBef>
+              <a:spcAft>
+                <a:spcPts val="0"/>
+              </a:spcAft>
+            </a:pPr>
+            <a:r>
+              <a:rPr sz="1400" b="0">
+                <a:solidFill>
+                  <a:srgbClr val="5E6B7C"/>
+                </a:solidFill>
+                <a:latin typeface="Calibri"/>
+              </a:rPr>
+              <a:t>progress through them.</a:t>
+            </a:r>
+          </a:p>
+          <a:p>
+            <a:pPr algn="l">
+              <a:spcBef>
+                <a:spcPts val="770"/>
+              </a:spcBef>
+              <a:spcAft>
+                <a:spcPts val="0"/>
+              </a:spcAft>
+            </a:pPr>
+            <a:r>
+              <a:rPr sz="1400" b="0">
+                <a:solidFill>
+                  <a:srgbClr val="5E6B7C"/>
+                </a:solidFill>
+                <a:latin typeface="Calibri"/>
+              </a:rPr>
               <a:t>▸ The question bank beat its target: 15 per skill per difficulty,</a:t>
             </a:r>
           </a:p>
@@ -9045,7 +9063,7 @@
                 </a:solidFill>
                 <a:latin typeface="Calibri"/>
               </a:rPr>
-              <a:t>▸ 237 automated tests, run on every pull request.</a:t>
+              <a:t>▸ 250 automated tests, run on every pull request.</a:t>
             </a:r>
           </a:p>
         </p:txBody>
@@ -9059,7 +9077,7 @@
         <p:spPr>
           <a:xfrm>
             <a:off x="6233007" y="1955546"/>
-            <a:ext cx="5300319" cy="3834892"/>
+            <a:ext cx="5300319" cy="4051807"/>
           </a:xfrm>
           <a:prstGeom prst="roundRect">
             <a:avLst>
@@ -9093,7 +9111,7 @@
         <p:spPr>
           <a:xfrm>
             <a:off x="6233007" y="1955546"/>
-            <a:ext cx="50292" cy="3834892"/>
+            <a:ext cx="50292" cy="4051807"/>
           </a:xfrm>
           <a:prstGeom prst="rect">
             <a:avLst/>
@@ -9165,7 +9183,7 @@
         <p:spPr>
           <a:xfrm>
             <a:off x="6521043" y="2563114"/>
-            <a:ext cx="4847691" cy="3036824"/>
+            <a:ext cx="4847691" cy="2386076"/>
           </a:xfrm>
           <a:prstGeom prst="rect">
             <a:avLst/>
@@ -9289,44 +9307,6 @@
                 <a:latin typeface="Calibri"/>
               </a:rPr>
               <a:t>that quietly did nothing.</a:t>
-            </a:r>
-          </a:p>
-          <a:p>
-            <a:pPr algn="l">
-              <a:spcBef>
-                <a:spcPts val="770"/>
-              </a:spcBef>
-              <a:spcAft>
-                <a:spcPts val="0"/>
-              </a:spcAft>
-            </a:pPr>
-            <a:r>
-              <a:rPr sz="1400" b="0">
-                <a:solidFill>
-                  <a:srgbClr val="5E6B7C"/>
-                </a:solidFill>
-                <a:latin typeface="Calibri"/>
-              </a:rPr>
-              <a:t>▸ The prep roadmap has a finished, tested API but no screen - we</a:t>
-            </a:r>
-          </a:p>
-          <a:p>
-            <a:pPr algn="l">
-              <a:spcBef>
-                <a:spcPts val="0"/>
-              </a:spcBef>
-              <a:spcAft>
-                <a:spcPts val="0"/>
-              </a:spcAft>
-            </a:pPr>
-            <a:r>
-              <a:rPr sz="1400" b="0">
-                <a:solidFill>
-                  <a:srgbClr val="5E6B7C"/>
-                </a:solidFill>
-                <a:latin typeface="Calibri"/>
-              </a:rPr>
-              <a:t>chose to finish the quiz instead.</a:t>
             </a:r>
           </a:p>
           <a:p>
@@ -9642,7 +9622,7 @@
         <p:spPr>
           <a:xfrm>
             <a:off x="1143000" y="1143000"/>
-            <a:ext cx="3250082" cy="1572768"/>
+            <a:ext cx="3250082" cy="1642490"/>
           </a:xfrm>
           <a:prstGeom prst="roundRect">
             <a:avLst>
@@ -9676,7 +9656,7 @@
         <p:spPr>
           <a:xfrm>
             <a:off x="1143000" y="1143000"/>
-            <a:ext cx="50292" cy="1572768"/>
+            <a:ext cx="50292" cy="1642490"/>
           </a:xfrm>
           <a:prstGeom prst="rect">
             <a:avLst/>
@@ -9706,7 +9686,7 @@
         <p:spPr>
           <a:xfrm>
             <a:off x="1431036" y="1308100"/>
-            <a:ext cx="2797454" cy="278892"/>
+            <a:ext cx="2797454" cy="557784"/>
           </a:xfrm>
           <a:prstGeom prst="rect">
             <a:avLst/>
@@ -9734,7 +9714,26 @@
                 </a:solidFill>
                 <a:latin typeface="Calibri"/>
               </a:rPr>
-              <a:t>Ship the roadmap screen</a:t>
+              <a:t>Rank the roadmap by what</a:t>
+            </a:r>
+          </a:p>
+          <a:p>
+            <a:pPr algn="l">
+              <a:spcBef>
+                <a:spcPts val="0"/>
+              </a:spcBef>
+              <a:spcAft>
+                <a:spcPts val="0"/>
+              </a:spcAft>
+            </a:pPr>
+            <a:r>
+              <a:rPr sz="1800" b="1">
+                <a:solidFill>
+                  <a:srgbClr val="1B2430"/>
+                </a:solidFill>
+                <a:latin typeface="Calibri"/>
+              </a:rPr>
+              <a:t>you're weak at</a:t>
             </a:r>
           </a:p>
         </p:txBody>
@@ -9747,8 +9746,8 @@
         </p:nvSpPr>
         <p:spPr>
           <a:xfrm>
-            <a:off x="1431036" y="1688592"/>
-            <a:ext cx="2797454" cy="836676"/>
+            <a:off x="1431036" y="1967484"/>
+            <a:ext cx="2797454" cy="627507"/>
           </a:xfrm>
           <a:prstGeom prst="rect">
             <a:avLst/>
@@ -9776,7 +9775,7 @@
                 </a:solidFill>
                 <a:latin typeface="Calibri"/>
               </a:rPr>
-              <a:t>The API is already built and tested.</a:t>
+              <a:t>It orders skills by market demand</a:t>
             </a:r>
           </a:p>
           <a:p>
@@ -9795,7 +9794,7 @@
                 </a:solidFill>
                 <a:latin typeface="Calibri"/>
               </a:rPr>
-              <a:t>The shortest distance between where</a:t>
+              <a:t>today. It should also weigh what your</a:t>
             </a:r>
           </a:p>
           <a:p>
@@ -9814,26 +9813,7 @@
                 </a:solidFill>
                 <a:latin typeface="Calibri"/>
               </a:rPr>
-              <a:t>we are and a noticeably more useful</a:t>
-            </a:r>
-          </a:p>
-          <a:p>
-            <a:pPr algn="l">
-              <a:spcBef>
-                <a:spcPts val="0"/>
-              </a:spcBef>
-              <a:spcAft>
-                <a:spcPts val="0"/>
-              </a:spcAft>
-            </a:pPr>
-            <a:r>
-              <a:rPr sz="1350" b="0">
-                <a:solidFill>
-                  <a:srgbClr val="5E6B7C"/>
-                </a:solidFill>
-                <a:latin typeface="Calibri"/>
-              </a:rPr>
-              <a:t>app.</a:t>
+              <a:t>quiz scores say you don't know yet.</a:t>
             </a:r>
           </a:p>
         </p:txBody>
@@ -9847,7 +9827,7 @@
         <p:spPr>
           <a:xfrm>
             <a:off x="4630826" y="1143000"/>
-            <a:ext cx="3250082" cy="1572768"/>
+            <a:ext cx="3250082" cy="1642490"/>
           </a:xfrm>
           <a:prstGeom prst="roundRect">
             <a:avLst>
@@ -9881,7 +9861,7 @@
         <p:spPr>
           <a:xfrm>
             <a:off x="4630826" y="1143000"/>
-            <a:ext cx="50292" cy="1572768"/>
+            <a:ext cx="50292" cy="1642490"/>
           </a:xfrm>
           <a:prstGeom prst="rect">
             <a:avLst/>
@@ -10052,7 +10032,7 @@
         <p:spPr>
           <a:xfrm>
             <a:off x="8118652" y="1143000"/>
-            <a:ext cx="3250082" cy="1572768"/>
+            <a:ext cx="3250082" cy="1642490"/>
           </a:xfrm>
           <a:prstGeom prst="roundRect">
             <a:avLst>
@@ -10086,7 +10066,7 @@
         <p:spPr>
           <a:xfrm>
             <a:off x="8118652" y="1143000"/>
-            <a:ext cx="50292" cy="1572768"/>
+            <a:ext cx="50292" cy="1642490"/>
           </a:xfrm>
           <a:prstGeom prst="rect">
             <a:avLst/>
@@ -10256,7 +10236,7 @@
         </p:nvSpPr>
         <p:spPr>
           <a:xfrm>
-            <a:off x="1143000" y="3127248"/>
+            <a:off x="1143000" y="3196970"/>
             <a:ext cx="10225735" cy="822960"/>
           </a:xfrm>
           <a:prstGeom prst="rect">
@@ -10298,7 +10278,7 @@
         </p:nvSpPr>
         <p:spPr>
           <a:xfrm>
-            <a:off x="1143000" y="3913632"/>
+            <a:off x="1143000" y="3983354"/>
             <a:ext cx="9677095" cy="457200"/>
           </a:xfrm>
           <a:prstGeom prst="rect">
@@ -10340,7 +10320,7 @@
         </p:nvSpPr>
         <p:spPr>
           <a:xfrm>
-            <a:off x="1170432" y="4517136"/>
+            <a:off x="1170432" y="4586858"/>
             <a:ext cx="1371600" cy="44450"/>
           </a:xfrm>
           <a:prstGeom prst="rect">
@@ -10370,7 +10350,7 @@
         </p:nvSpPr>
         <p:spPr>
           <a:xfrm>
-            <a:off x="1143000" y="4818888"/>
+            <a:off x="1143000" y="4888610"/>
             <a:ext cx="10225735" cy="274320"/>
           </a:xfrm>
           <a:prstGeom prst="rect">
@@ -10412,7 +10392,7 @@
         </p:nvSpPr>
         <p:spPr>
           <a:xfrm>
-            <a:off x="1143000" y="5120640"/>
+            <a:off x="1143000" y="5190362"/>
             <a:ext cx="10225735" cy="365760"/>
           </a:xfrm>
           <a:prstGeom prst="rect">
@@ -14051,7 +14031,7 @@
                 </a:solidFill>
                 <a:latin typeface="Calibri"/>
               </a:rPr>
-              <a:t>237 automated tests - 209 backend, 28</a:t>
+              <a:t>250 automated tests - 222 backend, 28</a:t>
             </a:r>
           </a:p>
           <a:p>

--- a/presentation/JobHopper_Final_Presentation.pptx
+++ b/presentation/JobHopper_Final_Presentation.pptx
@@ -1321,7 +1321,7 @@
           </a:p>
           <a:p>
             <a:r>
-              <a:t>so 1,260 questions. And 237 tests on every pull request.</a:t>
+              <a:t>so 1,260 questions. And 250 tests on every pull request.</a:t>
             </a:r>
           </a:p>
           <a:p/>
@@ -1429,22 +1429,22 @@
           <a:p/>
           <a:p>
             <a:r>
-              <a:t>Three things next. Ship the roadmap screen - the API is already there. Widen the</a:t>
-            </a:r>
-          </a:p>
-          <a:p>
-            <a:r>
-              <a:t>ingest; the pipeline isn't the limit, the skill vocabulary is. And the one we</a:t>
-            </a:r>
-          </a:p>
-          <a:p>
-            <a:r>
-              <a:t>actually want: close the loop, so the skills you keep getting wrong become the</a:t>
-            </a:r>
-          </a:p>
-          <a:p>
-            <a:r>
-              <a:t>ones your cloud puts in front of you.</a:t>
+              <a:t>Three things next. Rank the roadmap by what you're weak at, not just by what the</a:t>
+            </a:r>
+          </a:p>
+          <a:p>
+            <a:r>
+              <a:t>market wants. Widen the ingest; the pipeline isn't the limit, the skill</a:t>
+            </a:r>
+          </a:p>
+          <a:p>
+            <a:r>
+              <a:t>vocabulary is. And the one we actually want: close the loop, so the skills you</a:t>
+            </a:r>
+          </a:p>
+          <a:p>
+            <a:r>
+              <a:t>keep getting wrong become the ones your cloud puts in front of you.</a:t>
             </a:r>
           </a:p>
           <a:p/>
@@ -1944,7 +1944,7 @@
           </a:p>
           <a:p>
             <a:r>
-              <a:t>237 tests, with nothing merging until both suites pass.</a:t>
+              <a:t>250 tests, with nothing merging until both suites pass.</a:t>
             </a:r>
           </a:p>
         </p:txBody>
@@ -2026,7 +2026,7 @@
           <a:p/>
           <a:p>
             <a:r>
-              <a:t>Top: the browser. Eleven HTML pages, Bootstrap, Sass, plain JavaScript modules -</a:t>
+              <a:t>Top: the browser. Twelve HTML pages, Bootstrap, Sass, plain JavaScript modules -</a:t>
             </a:r>
           </a:p>
           <a:p>
@@ -2042,7 +2042,7 @@
           <a:p/>
           <a:p>
             <a:r>
-              <a:t>The middle band is where every rule lives: FastAPI, sixteen endpoints, Pydantic</a:t>
+              <a:t>The middle band is where every rule lives: FastAPI, seventeen endpoints, Pydantic</a:t>
             </a:r>
           </a:p>
           <a:p>
@@ -2208,7 +2208,7 @@
           </a:p>
           <a:p>
             <a:r>
-              <a:t>eleven pages.</a:t>
+              <a:t>twelve pages.</a:t>
             </a:r>
           </a:p>
           <a:p/>
@@ -8778,7 +8778,7 @@
         <p:spPr>
           <a:xfrm>
             <a:off x="658368" y="1955546"/>
-            <a:ext cx="5300319" cy="3834892"/>
+            <a:ext cx="5300319" cy="4051807"/>
           </a:xfrm>
           <a:prstGeom prst="roundRect">
             <a:avLst>
@@ -8812,7 +8812,7 @@
         <p:spPr>
           <a:xfrm>
             <a:off x="658368" y="1955546"/>
-            <a:ext cx="50292" cy="3834892"/>
+            <a:ext cx="50292" cy="4051807"/>
           </a:xfrm>
           <a:prstGeom prst="rect">
             <a:avLst/>
@@ -8884,7 +8884,7 @@
         <p:spPr>
           <a:xfrm>
             <a:off x="946404" y="2563114"/>
-            <a:ext cx="4847691" cy="2602992"/>
+            <a:ext cx="4847691" cy="3253740"/>
           </a:xfrm>
           <a:prstGeom prst="rect">
             <a:avLst/>
@@ -9007,6 +9007,44 @@
                 </a:solidFill>
                 <a:latin typeface="Calibri"/>
               </a:rPr>
+              <a:t>▸ The prep roadmap ranks a role's skills by demand and tracks</a:t>
+            </a:r>
+          </a:p>
+          <a:p>
+            <a:pPr algn="l">
+              <a:spcBef>
+                <a:spcPts val="0"/>
+              </a:spcBef>
+              <a:spcAft>
+                <a:spcPts val="0"/>
+              </a:spcAft>
+            </a:pPr>
+            <a:r>
+              <a:rPr sz="1400" b="0">
+                <a:solidFill>
+                  <a:srgbClr val="5E6B7C"/>
+                </a:solidFill>
+                <a:latin typeface="Calibri"/>
+              </a:rPr>
+              <a:t>progress through them.</a:t>
+            </a:r>
+          </a:p>
+          <a:p>
+            <a:pPr algn="l">
+              <a:spcBef>
+                <a:spcPts val="770"/>
+              </a:spcBef>
+              <a:spcAft>
+                <a:spcPts val="0"/>
+              </a:spcAft>
+            </a:pPr>
+            <a:r>
+              <a:rPr sz="1400" b="0">
+                <a:solidFill>
+                  <a:srgbClr val="5E6B7C"/>
+                </a:solidFill>
+                <a:latin typeface="Calibri"/>
+              </a:rPr>
               <a:t>▸ The question bank beat its target: 15 per skill per difficulty,</a:t>
             </a:r>
           </a:p>
@@ -9045,7 +9083,7 @@
                 </a:solidFill>
                 <a:latin typeface="Calibri"/>
               </a:rPr>
-              <a:t>▸ 237 automated tests, run on every pull request.</a:t>
+              <a:t>▸ 250 automated tests, run on every pull request.</a:t>
             </a:r>
           </a:p>
         </p:txBody>
@@ -9059,7 +9097,7 @@
         <p:spPr>
           <a:xfrm>
             <a:off x="6233007" y="1955546"/>
-            <a:ext cx="5300319" cy="3834892"/>
+            <a:ext cx="5300319" cy="4051807"/>
           </a:xfrm>
           <a:prstGeom prst="roundRect">
             <a:avLst>
@@ -9093,7 +9131,7 @@
         <p:spPr>
           <a:xfrm>
             <a:off x="6233007" y="1955546"/>
-            <a:ext cx="50292" cy="3834892"/>
+            <a:ext cx="50292" cy="4051807"/>
           </a:xfrm>
           <a:prstGeom prst="rect">
             <a:avLst/>
@@ -9165,7 +9203,7 @@
         <p:spPr>
           <a:xfrm>
             <a:off x="6521043" y="2563114"/>
-            <a:ext cx="4847691" cy="3036824"/>
+            <a:ext cx="4847691" cy="2386076"/>
           </a:xfrm>
           <a:prstGeom prst="rect">
             <a:avLst/>
@@ -9289,44 +9327,6 @@
                 <a:latin typeface="Calibri"/>
               </a:rPr>
               <a:t>that quietly did nothing.</a:t>
-            </a:r>
-          </a:p>
-          <a:p>
-            <a:pPr algn="l">
-              <a:spcBef>
-                <a:spcPts val="770"/>
-              </a:spcBef>
-              <a:spcAft>
-                <a:spcPts val="0"/>
-              </a:spcAft>
-            </a:pPr>
-            <a:r>
-              <a:rPr sz="1400" b="0">
-                <a:solidFill>
-                  <a:srgbClr val="5E6B7C"/>
-                </a:solidFill>
-                <a:latin typeface="Calibri"/>
-              </a:rPr>
-              <a:t>▸ The prep roadmap has a finished, tested API but no screen - we</a:t>
-            </a:r>
-          </a:p>
-          <a:p>
-            <a:pPr algn="l">
-              <a:spcBef>
-                <a:spcPts val="0"/>
-              </a:spcBef>
-              <a:spcAft>
-                <a:spcPts val="0"/>
-              </a:spcAft>
-            </a:pPr>
-            <a:r>
-              <a:rPr sz="1400" b="0">
-                <a:solidFill>
-                  <a:srgbClr val="5E6B7C"/>
-                </a:solidFill>
-                <a:latin typeface="Calibri"/>
-              </a:rPr>
-              <a:t>chose to finish the quiz instead.</a:t>
             </a:r>
           </a:p>
           <a:p>
@@ -9642,7 +9642,7 @@
         <p:spPr>
           <a:xfrm>
             <a:off x="1143000" y="1143000"/>
-            <a:ext cx="3250082" cy="1572768"/>
+            <a:ext cx="3250082" cy="1642490"/>
           </a:xfrm>
           <a:prstGeom prst="roundRect">
             <a:avLst>
@@ -9676,7 +9676,7 @@
         <p:spPr>
           <a:xfrm>
             <a:off x="1143000" y="1143000"/>
-            <a:ext cx="50292" cy="1572768"/>
+            <a:ext cx="50292" cy="1642490"/>
           </a:xfrm>
           <a:prstGeom prst="rect">
             <a:avLst/>
@@ -9706,7 +9706,7 @@
         <p:spPr>
           <a:xfrm>
             <a:off x="1431036" y="1308100"/>
-            <a:ext cx="2797454" cy="278892"/>
+            <a:ext cx="2797454" cy="557784"/>
           </a:xfrm>
           <a:prstGeom prst="rect">
             <a:avLst/>
@@ -9734,7 +9734,26 @@
                 </a:solidFill>
                 <a:latin typeface="Calibri"/>
               </a:rPr>
-              <a:t>Ship the roadmap screen</a:t>
+              <a:t>Rank the roadmap by what</a:t>
+            </a:r>
+          </a:p>
+          <a:p>
+            <a:pPr algn="l">
+              <a:spcBef>
+                <a:spcPts val="0"/>
+              </a:spcBef>
+              <a:spcAft>
+                <a:spcPts val="0"/>
+              </a:spcAft>
+            </a:pPr>
+            <a:r>
+              <a:rPr sz="1800" b="1">
+                <a:solidFill>
+                  <a:srgbClr val="1B2430"/>
+                </a:solidFill>
+                <a:latin typeface="Calibri"/>
+              </a:rPr>
+              <a:t>you're weak at</a:t>
             </a:r>
           </a:p>
         </p:txBody>
@@ -9747,8 +9766,8 @@
         </p:nvSpPr>
         <p:spPr>
           <a:xfrm>
-            <a:off x="1431036" y="1688592"/>
-            <a:ext cx="2797454" cy="836676"/>
+            <a:off x="1431036" y="1967484"/>
+            <a:ext cx="2797454" cy="627507"/>
           </a:xfrm>
           <a:prstGeom prst="rect">
             <a:avLst/>
@@ -9776,7 +9795,7 @@
                 </a:solidFill>
                 <a:latin typeface="Calibri"/>
               </a:rPr>
-              <a:t>The API is already built and tested.</a:t>
+              <a:t>It orders skills by market demand</a:t>
             </a:r>
           </a:p>
           <a:p>
@@ -9795,7 +9814,7 @@
                 </a:solidFill>
                 <a:latin typeface="Calibri"/>
               </a:rPr>
-              <a:t>The shortest distance between where</a:t>
+              <a:t>today. It should also weigh what your</a:t>
             </a:r>
           </a:p>
           <a:p>
@@ -9814,26 +9833,7 @@
                 </a:solidFill>
                 <a:latin typeface="Calibri"/>
               </a:rPr>
-              <a:t>we are and a noticeably more useful</a:t>
-            </a:r>
-          </a:p>
-          <a:p>
-            <a:pPr algn="l">
-              <a:spcBef>
-                <a:spcPts val="0"/>
-              </a:spcBef>
-              <a:spcAft>
-                <a:spcPts val="0"/>
-              </a:spcAft>
-            </a:pPr>
-            <a:r>
-              <a:rPr sz="1350" b="0">
-                <a:solidFill>
-                  <a:srgbClr val="5E6B7C"/>
-                </a:solidFill>
-                <a:latin typeface="Calibri"/>
-              </a:rPr>
-              <a:t>app.</a:t>
+              <a:t>quiz scores say you don't know yet.</a:t>
             </a:r>
           </a:p>
         </p:txBody>
@@ -9847,7 +9847,7 @@
         <p:spPr>
           <a:xfrm>
             <a:off x="4630826" y="1143000"/>
-            <a:ext cx="3250082" cy="1572768"/>
+            <a:ext cx="3250082" cy="1642490"/>
           </a:xfrm>
           <a:prstGeom prst="roundRect">
             <a:avLst>
@@ -9881,7 +9881,7 @@
         <p:spPr>
           <a:xfrm>
             <a:off x="4630826" y="1143000"/>
-            <a:ext cx="50292" cy="1572768"/>
+            <a:ext cx="50292" cy="1642490"/>
           </a:xfrm>
           <a:prstGeom prst="rect">
             <a:avLst/>
@@ -10052,7 +10052,7 @@
         <p:spPr>
           <a:xfrm>
             <a:off x="8118652" y="1143000"/>
-            <a:ext cx="3250082" cy="1572768"/>
+            <a:ext cx="3250082" cy="1642490"/>
           </a:xfrm>
           <a:prstGeom prst="roundRect">
             <a:avLst>
@@ -10086,7 +10086,7 @@
         <p:spPr>
           <a:xfrm>
             <a:off x="8118652" y="1143000"/>
-            <a:ext cx="50292" cy="1572768"/>
+            <a:ext cx="50292" cy="1642490"/>
           </a:xfrm>
           <a:prstGeom prst="rect">
             <a:avLst/>
@@ -10256,7 +10256,7 @@
         </p:nvSpPr>
         <p:spPr>
           <a:xfrm>
-            <a:off x="1143000" y="3127248"/>
+            <a:off x="1143000" y="3196970"/>
             <a:ext cx="10225735" cy="822960"/>
           </a:xfrm>
           <a:prstGeom prst="rect">
@@ -10298,7 +10298,7 @@
         </p:nvSpPr>
         <p:spPr>
           <a:xfrm>
-            <a:off x="1143000" y="3913632"/>
+            <a:off x="1143000" y="3983354"/>
             <a:ext cx="9677095" cy="457200"/>
           </a:xfrm>
           <a:prstGeom prst="rect">
@@ -10340,7 +10340,7 @@
         </p:nvSpPr>
         <p:spPr>
           <a:xfrm>
-            <a:off x="1170432" y="4517136"/>
+            <a:off x="1170432" y="4586858"/>
             <a:ext cx="1371600" cy="44450"/>
           </a:xfrm>
           <a:prstGeom prst="rect">
@@ -10370,7 +10370,7 @@
         </p:nvSpPr>
         <p:spPr>
           <a:xfrm>
-            <a:off x="1143000" y="4818888"/>
+            <a:off x="1143000" y="4888610"/>
             <a:ext cx="10225735" cy="274320"/>
           </a:xfrm>
           <a:prstGeom prst="rect">
@@ -10412,7 +10412,7 @@
         </p:nvSpPr>
         <p:spPr>
           <a:xfrm>
-            <a:off x="1143000" y="5120640"/>
+            <a:off x="1143000" y="5190362"/>
             <a:ext cx="10225735" cy="365760"/>
           </a:xfrm>
           <a:prstGeom prst="rect">
@@ -14051,7 +14051,7 @@
                 </a:solidFill>
                 <a:latin typeface="Calibri"/>
               </a:rPr>
-              <a:t>237 automated tests - 209 backend, 28</a:t>
+              <a:t>250 automated tests - 222 backend, 28</a:t>
             </a:r>
           </a:p>
           <a:p>
@@ -15144,7 +15144,7 @@
                 </a:solidFill>
                 <a:latin typeface="Calibri"/>
               </a:rPr>
-              <a:t>shared palette across eleven pages.</a:t>
+              <a:t>shared palette across twelve pages.</a:t>
             </a:r>
           </a:p>
         </p:txBody>

--- a/presentation/JobHopper_Final_Presentation.pptx
+++ b/presentation/JobHopper_Final_Presentation.pptx
@@ -1321,7 +1321,7 @@
           </a:p>
           <a:p>
             <a:r>
-              <a:t>so 1,260 questions. And 250 tests on every pull request.</a:t>
+              <a:t>so more than 1,250 questions. And 250 tests on every pull request.</a:t>
             </a:r>
           </a:p>
           <a:p/>
@@ -9045,7 +9045,7 @@
                 </a:solidFill>
                 <a:latin typeface="Calibri"/>
               </a:rPr>
-              <a:t>▸ The question bank beat its target: 15 per skill per difficulty,</a:t>
+              <a:t>▸ The question bank beat its target: about 15 per skill per</a:t>
             </a:r>
           </a:p>
           <a:p>
@@ -9064,7 +9064,7 @@
                 </a:solidFill>
                 <a:latin typeface="Calibri"/>
               </a:rPr>
-              <a:t>which is 1,260 questions across 28 skills.</a:t>
+              <a:t>difficulty, which is 1,251 questions across 28 skills.</a:t>
             </a:r>
           </a:p>
           <a:p>
